--- a/docs/plots/grant/jx_grant_linsubhr_diff_throm2.pptx
+++ b/docs/plots/grant/jx_grant_linsubhr_diff_throm2.pptx
@@ -2271,7 +2271,7 @@
           </p:nvSpPr>
           <p:spPr>
             <a:xfrm>
-              <a:off x="915645" y="5038294"/>
+              <a:off x="915645" y="5067975"/>
               <a:ext cx="7682587" cy="0"/>
             </a:xfrm>
             <a:custGeom>
@@ -2314,7 +2314,7 @@
           </p:nvSpPr>
           <p:spPr>
             <a:xfrm>
-              <a:off x="915645" y="4273666"/>
+              <a:off x="915645" y="4288924"/>
               <a:ext cx="7682587" cy="0"/>
             </a:xfrm>
             <a:custGeom>
@@ -2357,7 +2357,7 @@
           </p:nvSpPr>
           <p:spPr>
             <a:xfrm>
-              <a:off x="915645" y="3509037"/>
+              <a:off x="915645" y="3509873"/>
               <a:ext cx="7682587" cy="0"/>
             </a:xfrm>
             <a:custGeom>
@@ -2400,7 +2400,7 @@
           </p:nvSpPr>
           <p:spPr>
             <a:xfrm>
-              <a:off x="915645" y="2744409"/>
+              <a:off x="915645" y="2730822"/>
               <a:ext cx="7682587" cy="0"/>
             </a:xfrm>
             <a:custGeom>
@@ -2443,15 +2443,15 @@
           </p:nvSpPr>
           <p:spPr>
             <a:xfrm>
-              <a:off x="1701364" y="2209169"/>
-              <a:ext cx="0" cy="3364365"/>
+              <a:off x="1264853" y="2185486"/>
+              <a:ext cx="0" cy="3427824"/>
             </a:xfrm>
             <a:custGeom>
               <a:avLst/>
               <a:pathLst>
-                <a:path w="0" h="3364365">
+                <a:path w="0" h="3427824">
                   <a:moveTo>
-                    <a:pt x="0" y="3364365"/>
+                    <a:pt x="0" y="3427824"/>
                   </a:moveTo>
                   <a:lnTo>
                     <a:pt x="0" y="0"/>
@@ -2486,15 +2486,15 @@
           </p:nvSpPr>
           <p:spPr>
             <a:xfrm>
-              <a:off x="3447406" y="2209169"/>
-              <a:ext cx="0" cy="3364365"/>
+              <a:off x="2137874" y="2185486"/>
+              <a:ext cx="0" cy="3427824"/>
             </a:xfrm>
             <a:custGeom>
               <a:avLst/>
               <a:pathLst>
-                <a:path w="0" h="3364365">
+                <a:path w="0" h="3427824">
                   <a:moveTo>
-                    <a:pt x="0" y="3364365"/>
+                    <a:pt x="0" y="3427824"/>
                   </a:moveTo>
                   <a:lnTo>
                     <a:pt x="0" y="0"/>
@@ -2529,15 +2529,15 @@
           </p:nvSpPr>
           <p:spPr>
             <a:xfrm>
-              <a:off x="5193449" y="2209169"/>
-              <a:ext cx="0" cy="3364365"/>
+              <a:off x="3010896" y="2185486"/>
+              <a:ext cx="0" cy="3427824"/>
             </a:xfrm>
             <a:custGeom>
               <a:avLst/>
               <a:pathLst>
-                <a:path w="0" h="3364365">
+                <a:path w="0" h="3427824">
                   <a:moveTo>
-                    <a:pt x="0" y="3364365"/>
+                    <a:pt x="0" y="3427824"/>
                   </a:moveTo>
                   <a:lnTo>
                     <a:pt x="0" y="0"/>
@@ -2572,15 +2572,15 @@
           </p:nvSpPr>
           <p:spPr>
             <a:xfrm>
-              <a:off x="6939491" y="2209169"/>
-              <a:ext cx="0" cy="3364365"/>
+              <a:off x="3883917" y="2185486"/>
+              <a:ext cx="0" cy="3427824"/>
             </a:xfrm>
             <a:custGeom>
               <a:avLst/>
               <a:pathLst>
-                <a:path w="0" h="3364365">
+                <a:path w="0" h="3427824">
                   <a:moveTo>
-                    <a:pt x="0" y="3364365"/>
+                    <a:pt x="0" y="3427824"/>
                   </a:moveTo>
                   <a:lnTo>
                     <a:pt x="0" y="0"/>
@@ -2615,26 +2615,26 @@
           </p:nvSpPr>
           <p:spPr>
             <a:xfrm>
-              <a:off x="915645" y="5420609"/>
-              <a:ext cx="7682587" cy="0"/>
+              <a:off x="4756938" y="2185486"/>
+              <a:ext cx="0" cy="3427824"/>
             </a:xfrm>
             <a:custGeom>
               <a:avLst/>
               <a:pathLst>
-                <a:path w="7682587" h="0">
+                <a:path w="0" h="3427824">
                   <a:moveTo>
+                    <a:pt x="0" y="3427824"/>
+                  </a:moveTo>
+                  <a:lnTo>
                     <a:pt x="0" y="0"/>
-                  </a:moveTo>
-                  <a:lnTo>
-                    <a:pt x="7682587" y="0"/>
-                  </a:lnTo>
-                  <a:lnTo>
-                    <a:pt x="7682587" y="0"/>
+                  </a:lnTo>
+                  <a:lnTo>
+                    <a:pt x="0" y="0"/>
                   </a:lnTo>
                 </a:path>
               </a:pathLst>
             </a:custGeom>
-            <a:ln w="17246" cap="flat">
+            <a:ln w="8623" cap="flat">
               <a:solidFill>
                 <a:srgbClr val="EBEBEB">
                   <a:alpha val="100000"/>
@@ -2658,26 +2658,26 @@
           </p:nvSpPr>
           <p:spPr>
             <a:xfrm>
-              <a:off x="915645" y="4655980"/>
-              <a:ext cx="7682587" cy="0"/>
+              <a:off x="5629959" y="2185486"/>
+              <a:ext cx="0" cy="3427824"/>
             </a:xfrm>
             <a:custGeom>
               <a:avLst/>
               <a:pathLst>
-                <a:path w="7682587" h="0">
+                <a:path w="0" h="3427824">
                   <a:moveTo>
+                    <a:pt x="0" y="3427824"/>
+                  </a:moveTo>
+                  <a:lnTo>
                     <a:pt x="0" y="0"/>
-                  </a:moveTo>
-                  <a:lnTo>
-                    <a:pt x="7682587" y="0"/>
-                  </a:lnTo>
-                  <a:lnTo>
-                    <a:pt x="7682587" y="0"/>
+                  </a:lnTo>
+                  <a:lnTo>
+                    <a:pt x="0" y="0"/>
                   </a:lnTo>
                 </a:path>
               </a:pathLst>
             </a:custGeom>
-            <a:ln w="17246" cap="flat">
+            <a:ln w="8623" cap="flat">
               <a:solidFill>
                 <a:srgbClr val="EBEBEB">
                   <a:alpha val="100000"/>
@@ -2701,26 +2701,26 @@
           </p:nvSpPr>
           <p:spPr>
             <a:xfrm>
-              <a:off x="915645" y="3891352"/>
-              <a:ext cx="7682587" cy="0"/>
+              <a:off x="6502981" y="2185486"/>
+              <a:ext cx="0" cy="3427824"/>
             </a:xfrm>
             <a:custGeom>
               <a:avLst/>
               <a:pathLst>
-                <a:path w="7682587" h="0">
+                <a:path w="0" h="3427824">
                   <a:moveTo>
+                    <a:pt x="0" y="3427824"/>
+                  </a:moveTo>
+                  <a:lnTo>
                     <a:pt x="0" y="0"/>
-                  </a:moveTo>
-                  <a:lnTo>
-                    <a:pt x="7682587" y="0"/>
-                  </a:lnTo>
-                  <a:lnTo>
-                    <a:pt x="7682587" y="0"/>
+                  </a:lnTo>
+                  <a:lnTo>
+                    <a:pt x="0" y="0"/>
                   </a:lnTo>
                 </a:path>
               </a:pathLst>
             </a:custGeom>
-            <a:ln w="17246" cap="flat">
+            <a:ln w="8623" cap="flat">
               <a:solidFill>
                 <a:srgbClr val="EBEBEB">
                   <a:alpha val="100000"/>
@@ -2744,26 +2744,26 @@
           </p:nvSpPr>
           <p:spPr>
             <a:xfrm>
-              <a:off x="915645" y="3126723"/>
-              <a:ext cx="7682587" cy="0"/>
+              <a:off x="7376002" y="2185486"/>
+              <a:ext cx="0" cy="3427824"/>
             </a:xfrm>
             <a:custGeom>
               <a:avLst/>
               <a:pathLst>
-                <a:path w="7682587" h="0">
+                <a:path w="0" h="3427824">
                   <a:moveTo>
+                    <a:pt x="0" y="3427824"/>
+                  </a:moveTo>
+                  <a:lnTo>
                     <a:pt x="0" y="0"/>
-                  </a:moveTo>
-                  <a:lnTo>
-                    <a:pt x="7682587" y="0"/>
-                  </a:lnTo>
-                  <a:lnTo>
-                    <a:pt x="7682587" y="0"/>
+                  </a:lnTo>
+                  <a:lnTo>
+                    <a:pt x="0" y="0"/>
                   </a:lnTo>
                 </a:path>
               </a:pathLst>
             </a:custGeom>
-            <a:ln w="17246" cap="flat">
+            <a:ln w="8623" cap="flat">
               <a:solidFill>
                 <a:srgbClr val="EBEBEB">
                   <a:alpha val="100000"/>
@@ -2787,26 +2787,26 @@
           </p:nvSpPr>
           <p:spPr>
             <a:xfrm>
-              <a:off x="915645" y="2362095"/>
-              <a:ext cx="7682587" cy="0"/>
+              <a:off x="8249023" y="2185486"/>
+              <a:ext cx="0" cy="3427824"/>
             </a:xfrm>
             <a:custGeom>
               <a:avLst/>
               <a:pathLst>
-                <a:path w="7682587" h="0">
+                <a:path w="0" h="3427824">
                   <a:moveTo>
+                    <a:pt x="0" y="3427824"/>
+                  </a:moveTo>
+                  <a:lnTo>
                     <a:pt x="0" y="0"/>
-                  </a:moveTo>
-                  <a:lnTo>
-                    <a:pt x="7682587" y="0"/>
-                  </a:lnTo>
-                  <a:lnTo>
-                    <a:pt x="7682587" y="0"/>
+                  </a:lnTo>
+                  <a:lnTo>
+                    <a:pt x="0" y="0"/>
                   </a:lnTo>
                 </a:path>
               </a:pathLst>
             </a:custGeom>
-            <a:ln w="17246" cap="flat">
+            <a:ln w="8623" cap="flat">
               <a:solidFill>
                 <a:srgbClr val="EBEBEB">
                   <a:alpha val="100000"/>
@@ -2830,21 +2830,21 @@
           </p:nvSpPr>
           <p:spPr>
             <a:xfrm>
-              <a:off x="2574385" y="2209169"/>
-              <a:ext cx="0" cy="3364365"/>
+              <a:off x="915645" y="5457500"/>
+              <a:ext cx="7682587" cy="0"/>
             </a:xfrm>
             <a:custGeom>
               <a:avLst/>
               <a:pathLst>
-                <a:path w="0" h="3364365">
+                <a:path w="7682587" h="0">
                   <a:moveTo>
-                    <a:pt x="0" y="3364365"/>
+                    <a:pt x="0" y="0"/>
                   </a:moveTo>
                   <a:lnTo>
-                    <a:pt x="0" y="0"/>
-                  </a:lnTo>
-                  <a:lnTo>
-                    <a:pt x="0" y="0"/>
+                    <a:pt x="7682587" y="0"/>
+                  </a:lnTo>
+                  <a:lnTo>
+                    <a:pt x="7682587" y="0"/>
                   </a:lnTo>
                 </a:path>
               </a:pathLst>
@@ -2873,21 +2873,21 @@
           </p:nvSpPr>
           <p:spPr>
             <a:xfrm>
-              <a:off x="4320427" y="2209169"/>
-              <a:ext cx="0" cy="3364365"/>
+              <a:off x="915645" y="4678449"/>
+              <a:ext cx="7682587" cy="0"/>
             </a:xfrm>
             <a:custGeom>
               <a:avLst/>
               <a:pathLst>
-                <a:path w="0" h="3364365">
+                <a:path w="7682587" h="0">
                   <a:moveTo>
-                    <a:pt x="0" y="3364365"/>
+                    <a:pt x="0" y="0"/>
                   </a:moveTo>
                   <a:lnTo>
-                    <a:pt x="0" y="0"/>
-                  </a:lnTo>
-                  <a:lnTo>
-                    <a:pt x="0" y="0"/>
+                    <a:pt x="7682587" y="0"/>
+                  </a:lnTo>
+                  <a:lnTo>
+                    <a:pt x="7682587" y="0"/>
                   </a:lnTo>
                 </a:path>
               </a:pathLst>
@@ -2916,21 +2916,21 @@
           </p:nvSpPr>
           <p:spPr>
             <a:xfrm>
-              <a:off x="6066470" y="2209169"/>
-              <a:ext cx="0" cy="3364365"/>
+              <a:off x="915645" y="3899398"/>
+              <a:ext cx="7682587" cy="0"/>
             </a:xfrm>
             <a:custGeom>
               <a:avLst/>
               <a:pathLst>
-                <a:path w="0" h="3364365">
+                <a:path w="7682587" h="0">
                   <a:moveTo>
-                    <a:pt x="0" y="3364365"/>
+                    <a:pt x="0" y="0"/>
                   </a:moveTo>
                   <a:lnTo>
-                    <a:pt x="0" y="0"/>
-                  </a:lnTo>
-                  <a:lnTo>
-                    <a:pt x="0" y="0"/>
+                    <a:pt x="7682587" y="0"/>
+                  </a:lnTo>
+                  <a:lnTo>
+                    <a:pt x="7682587" y="0"/>
                   </a:lnTo>
                 </a:path>
               </a:pathLst>
@@ -2959,21 +2959,21 @@
           </p:nvSpPr>
           <p:spPr>
             <a:xfrm>
-              <a:off x="7812512" y="2209169"/>
-              <a:ext cx="0" cy="3364365"/>
+              <a:off x="915645" y="3120347"/>
+              <a:ext cx="7682587" cy="0"/>
             </a:xfrm>
             <a:custGeom>
               <a:avLst/>
               <a:pathLst>
-                <a:path w="0" h="3364365">
+                <a:path w="7682587" h="0">
                   <a:moveTo>
-                    <a:pt x="0" y="3364365"/>
+                    <a:pt x="0" y="0"/>
                   </a:moveTo>
                   <a:lnTo>
-                    <a:pt x="0" y="0"/>
-                  </a:lnTo>
-                  <a:lnTo>
-                    <a:pt x="0" y="0"/>
+                    <a:pt x="7682587" y="0"/>
+                  </a:lnTo>
+                  <a:lnTo>
+                    <a:pt x="7682587" y="0"/>
                   </a:lnTo>
                 </a:path>
               </a:pathLst>
@@ -2996,516 +2996,903 @@
         </p:sp>
         <p:sp>
           <p:nvSpPr>
-            <p:cNvPr id="21" name="pg21"/>
+            <p:cNvPr id="21" name="pl21"/>
             <p:cNvSpPr/>
             <p:nvPr/>
           </p:nvSpPr>
           <p:spPr>
             <a:xfrm>
-              <a:off x="915645" y="2209169"/>
-              <a:ext cx="7260303" cy="3199713"/>
+              <a:off x="915645" y="2341296"/>
+              <a:ext cx="7682587" cy="0"/>
             </a:xfrm>
             <a:custGeom>
               <a:avLst/>
               <a:pathLst>
-                <a:path w="7260303" h="3199713">
+                <a:path w="7682587" h="0">
+                  <a:moveTo>
+                    <a:pt x="0" y="0"/>
+                  </a:moveTo>
+                  <a:lnTo>
+                    <a:pt x="7682587" y="0"/>
+                  </a:lnTo>
+                  <a:lnTo>
+                    <a:pt x="7682587" y="0"/>
+                  </a:lnTo>
+                </a:path>
+              </a:pathLst>
+            </a:custGeom>
+            <a:ln w="17246" cap="flat">
+              <a:solidFill>
+                <a:srgbClr val="EBEBEB">
+                  <a:alpha val="100000"/>
+                </a:srgbClr>
+              </a:solidFill>
+              <a:prstDash val="solid"/>
+              <a:round/>
+            </a:ln>
+          </p:spPr>
+          <p:txBody>
+            <a:bodyPr/>
+            <a:lstStyle/>
+            <a:p/>
+          </p:txBody>
+        </p:sp>
+        <p:sp>
+          <p:nvSpPr>
+            <p:cNvPr id="22" name="pl22"/>
+            <p:cNvSpPr/>
+            <p:nvPr/>
+          </p:nvSpPr>
+          <p:spPr>
+            <a:xfrm>
+              <a:off x="1701364" y="2185486"/>
+              <a:ext cx="0" cy="3427824"/>
+            </a:xfrm>
+            <a:custGeom>
+              <a:avLst/>
+              <a:pathLst>
+                <a:path w="0" h="3427824">
+                  <a:moveTo>
+                    <a:pt x="0" y="3427824"/>
+                  </a:moveTo>
+                  <a:lnTo>
+                    <a:pt x="0" y="0"/>
+                  </a:lnTo>
+                  <a:lnTo>
+                    <a:pt x="0" y="0"/>
+                  </a:lnTo>
+                </a:path>
+              </a:pathLst>
+            </a:custGeom>
+            <a:ln w="17246" cap="flat">
+              <a:solidFill>
+                <a:srgbClr val="EBEBEB">
+                  <a:alpha val="100000"/>
+                </a:srgbClr>
+              </a:solidFill>
+              <a:prstDash val="solid"/>
+              <a:round/>
+            </a:ln>
+          </p:spPr>
+          <p:txBody>
+            <a:bodyPr/>
+            <a:lstStyle/>
+            <a:p/>
+          </p:txBody>
+        </p:sp>
+        <p:sp>
+          <p:nvSpPr>
+            <p:cNvPr id="23" name="pl23"/>
+            <p:cNvSpPr/>
+            <p:nvPr/>
+          </p:nvSpPr>
+          <p:spPr>
+            <a:xfrm>
+              <a:off x="2574385" y="2185486"/>
+              <a:ext cx="0" cy="3427824"/>
+            </a:xfrm>
+            <a:custGeom>
+              <a:avLst/>
+              <a:pathLst>
+                <a:path w="0" h="3427824">
+                  <a:moveTo>
+                    <a:pt x="0" y="3427824"/>
+                  </a:moveTo>
+                  <a:lnTo>
+                    <a:pt x="0" y="0"/>
+                  </a:lnTo>
+                  <a:lnTo>
+                    <a:pt x="0" y="0"/>
+                  </a:lnTo>
+                </a:path>
+              </a:pathLst>
+            </a:custGeom>
+            <a:ln w="17246" cap="flat">
+              <a:solidFill>
+                <a:srgbClr val="EBEBEB">
+                  <a:alpha val="100000"/>
+                </a:srgbClr>
+              </a:solidFill>
+              <a:prstDash val="solid"/>
+              <a:round/>
+            </a:ln>
+          </p:spPr>
+          <p:txBody>
+            <a:bodyPr/>
+            <a:lstStyle/>
+            <a:p/>
+          </p:txBody>
+        </p:sp>
+        <p:sp>
+          <p:nvSpPr>
+            <p:cNvPr id="24" name="pl24"/>
+            <p:cNvSpPr/>
+            <p:nvPr/>
+          </p:nvSpPr>
+          <p:spPr>
+            <a:xfrm>
+              <a:off x="3447406" y="2185486"/>
+              <a:ext cx="0" cy="3427824"/>
+            </a:xfrm>
+            <a:custGeom>
+              <a:avLst/>
+              <a:pathLst>
+                <a:path w="0" h="3427824">
+                  <a:moveTo>
+                    <a:pt x="0" y="3427824"/>
+                  </a:moveTo>
+                  <a:lnTo>
+                    <a:pt x="0" y="0"/>
+                  </a:lnTo>
+                  <a:lnTo>
+                    <a:pt x="0" y="0"/>
+                  </a:lnTo>
+                </a:path>
+              </a:pathLst>
+            </a:custGeom>
+            <a:ln w="17246" cap="flat">
+              <a:solidFill>
+                <a:srgbClr val="EBEBEB">
+                  <a:alpha val="100000"/>
+                </a:srgbClr>
+              </a:solidFill>
+              <a:prstDash val="solid"/>
+              <a:round/>
+            </a:ln>
+          </p:spPr>
+          <p:txBody>
+            <a:bodyPr/>
+            <a:lstStyle/>
+            <a:p/>
+          </p:txBody>
+        </p:sp>
+        <p:sp>
+          <p:nvSpPr>
+            <p:cNvPr id="25" name="pl25"/>
+            <p:cNvSpPr/>
+            <p:nvPr/>
+          </p:nvSpPr>
+          <p:spPr>
+            <a:xfrm>
+              <a:off x="4320427" y="2185486"/>
+              <a:ext cx="0" cy="3427824"/>
+            </a:xfrm>
+            <a:custGeom>
+              <a:avLst/>
+              <a:pathLst>
+                <a:path w="0" h="3427824">
+                  <a:moveTo>
+                    <a:pt x="0" y="3427824"/>
+                  </a:moveTo>
+                  <a:lnTo>
+                    <a:pt x="0" y="0"/>
+                  </a:lnTo>
+                  <a:lnTo>
+                    <a:pt x="0" y="0"/>
+                  </a:lnTo>
+                </a:path>
+              </a:pathLst>
+            </a:custGeom>
+            <a:ln w="17246" cap="flat">
+              <a:solidFill>
+                <a:srgbClr val="EBEBEB">
+                  <a:alpha val="100000"/>
+                </a:srgbClr>
+              </a:solidFill>
+              <a:prstDash val="solid"/>
+              <a:round/>
+            </a:ln>
+          </p:spPr>
+          <p:txBody>
+            <a:bodyPr/>
+            <a:lstStyle/>
+            <a:p/>
+          </p:txBody>
+        </p:sp>
+        <p:sp>
+          <p:nvSpPr>
+            <p:cNvPr id="26" name="pl26"/>
+            <p:cNvSpPr/>
+            <p:nvPr/>
+          </p:nvSpPr>
+          <p:spPr>
+            <a:xfrm>
+              <a:off x="5193449" y="2185486"/>
+              <a:ext cx="0" cy="3427824"/>
+            </a:xfrm>
+            <a:custGeom>
+              <a:avLst/>
+              <a:pathLst>
+                <a:path w="0" h="3427824">
+                  <a:moveTo>
+                    <a:pt x="0" y="3427824"/>
+                  </a:moveTo>
+                  <a:lnTo>
+                    <a:pt x="0" y="0"/>
+                  </a:lnTo>
+                  <a:lnTo>
+                    <a:pt x="0" y="0"/>
+                  </a:lnTo>
+                </a:path>
+              </a:pathLst>
+            </a:custGeom>
+            <a:ln w="17246" cap="flat">
+              <a:solidFill>
+                <a:srgbClr val="EBEBEB">
+                  <a:alpha val="100000"/>
+                </a:srgbClr>
+              </a:solidFill>
+              <a:prstDash val="solid"/>
+              <a:round/>
+            </a:ln>
+          </p:spPr>
+          <p:txBody>
+            <a:bodyPr/>
+            <a:lstStyle/>
+            <a:p/>
+          </p:txBody>
+        </p:sp>
+        <p:sp>
+          <p:nvSpPr>
+            <p:cNvPr id="27" name="pl27"/>
+            <p:cNvSpPr/>
+            <p:nvPr/>
+          </p:nvSpPr>
+          <p:spPr>
+            <a:xfrm>
+              <a:off x="6066470" y="2185486"/>
+              <a:ext cx="0" cy="3427824"/>
+            </a:xfrm>
+            <a:custGeom>
+              <a:avLst/>
+              <a:pathLst>
+                <a:path w="0" h="3427824">
+                  <a:moveTo>
+                    <a:pt x="0" y="3427824"/>
+                  </a:moveTo>
+                  <a:lnTo>
+                    <a:pt x="0" y="0"/>
+                  </a:lnTo>
+                  <a:lnTo>
+                    <a:pt x="0" y="0"/>
+                  </a:lnTo>
+                </a:path>
+              </a:pathLst>
+            </a:custGeom>
+            <a:ln w="17246" cap="flat">
+              <a:solidFill>
+                <a:srgbClr val="EBEBEB">
+                  <a:alpha val="100000"/>
+                </a:srgbClr>
+              </a:solidFill>
+              <a:prstDash val="solid"/>
+              <a:round/>
+            </a:ln>
+          </p:spPr>
+          <p:txBody>
+            <a:bodyPr/>
+            <a:lstStyle/>
+            <a:p/>
+          </p:txBody>
+        </p:sp>
+        <p:sp>
+          <p:nvSpPr>
+            <p:cNvPr id="28" name="pl28"/>
+            <p:cNvSpPr/>
+            <p:nvPr/>
+          </p:nvSpPr>
+          <p:spPr>
+            <a:xfrm>
+              <a:off x="6939491" y="2185486"/>
+              <a:ext cx="0" cy="3427824"/>
+            </a:xfrm>
+            <a:custGeom>
+              <a:avLst/>
+              <a:pathLst>
+                <a:path w="0" h="3427824">
+                  <a:moveTo>
+                    <a:pt x="0" y="3427824"/>
+                  </a:moveTo>
+                  <a:lnTo>
+                    <a:pt x="0" y="0"/>
+                  </a:lnTo>
+                  <a:lnTo>
+                    <a:pt x="0" y="0"/>
+                  </a:lnTo>
+                </a:path>
+              </a:pathLst>
+            </a:custGeom>
+            <a:ln w="17246" cap="flat">
+              <a:solidFill>
+                <a:srgbClr val="EBEBEB">
+                  <a:alpha val="100000"/>
+                </a:srgbClr>
+              </a:solidFill>
+              <a:prstDash val="solid"/>
+              <a:round/>
+            </a:ln>
+          </p:spPr>
+          <p:txBody>
+            <a:bodyPr/>
+            <a:lstStyle/>
+            <a:p/>
+          </p:txBody>
+        </p:sp>
+        <p:sp>
+          <p:nvSpPr>
+            <p:cNvPr id="29" name="pl29"/>
+            <p:cNvSpPr/>
+            <p:nvPr/>
+          </p:nvSpPr>
+          <p:spPr>
+            <a:xfrm>
+              <a:off x="7812512" y="2185486"/>
+              <a:ext cx="0" cy="3427824"/>
+            </a:xfrm>
+            <a:custGeom>
+              <a:avLst/>
+              <a:pathLst>
+                <a:path w="0" h="3427824">
+                  <a:moveTo>
+                    <a:pt x="0" y="3427824"/>
+                  </a:moveTo>
+                  <a:lnTo>
+                    <a:pt x="0" y="0"/>
+                  </a:lnTo>
+                  <a:lnTo>
+                    <a:pt x="0" y="0"/>
+                  </a:lnTo>
+                </a:path>
+              </a:pathLst>
+            </a:custGeom>
+            <a:ln w="17246" cap="flat">
+              <a:solidFill>
+                <a:srgbClr val="EBEBEB">
+                  <a:alpha val="100000"/>
+                </a:srgbClr>
+              </a:solidFill>
+              <a:prstDash val="solid"/>
+              <a:round/>
+            </a:ln>
+          </p:spPr>
+          <p:txBody>
+            <a:bodyPr/>
+            <a:lstStyle/>
+            <a:p/>
+          </p:txBody>
+        </p:sp>
+        <p:sp>
+          <p:nvSpPr>
+            <p:cNvPr id="30" name="pg30"/>
+            <p:cNvSpPr/>
+            <p:nvPr/>
+          </p:nvSpPr>
+          <p:spPr>
+            <a:xfrm>
+              <a:off x="915645" y="2185486"/>
+              <a:ext cx="7260303" cy="3260067"/>
+            </a:xfrm>
+            <a:custGeom>
+              <a:avLst/>
+              <a:pathLst>
+                <a:path w="7260303" h="3260067">
                   <a:moveTo>
                     <a:pt x="1987121" y="0"/>
                   </a:moveTo>
                   <a:lnTo>
-                    <a:pt x="2060450" y="241493"/>
-                  </a:lnTo>
-                  <a:lnTo>
-                    <a:pt x="2136918" y="473640"/>
-                  </a:lnTo>
-                  <a:lnTo>
-                    <a:pt x="2213386" y="687641"/>
-                  </a:lnTo>
-                  <a:lnTo>
-                    <a:pt x="2289855" y="884915"/>
-                  </a:lnTo>
-                  <a:lnTo>
-                    <a:pt x="2366323" y="1066769"/>
-                  </a:lnTo>
-                  <a:lnTo>
-                    <a:pt x="2442792" y="1234409"/>
-                  </a:lnTo>
-                  <a:lnTo>
-                    <a:pt x="2519260" y="1388944"/>
-                  </a:lnTo>
-                  <a:lnTo>
-                    <a:pt x="2595729" y="1531400"/>
-                  </a:lnTo>
-                  <a:lnTo>
-                    <a:pt x="2672197" y="1662721"/>
-                  </a:lnTo>
-                  <a:lnTo>
-                    <a:pt x="2748666" y="1783778"/>
-                  </a:lnTo>
-                  <a:lnTo>
-                    <a:pt x="2825134" y="1895372"/>
-                  </a:lnTo>
-                  <a:lnTo>
-                    <a:pt x="2901602" y="1998243"/>
-                  </a:lnTo>
-                  <a:lnTo>
-                    <a:pt x="2978071" y="2093073"/>
-                  </a:lnTo>
-                  <a:lnTo>
-                    <a:pt x="3054539" y="2180491"/>
-                  </a:lnTo>
-                  <a:lnTo>
-                    <a:pt x="3131008" y="2261075"/>
-                  </a:lnTo>
-                  <a:lnTo>
-                    <a:pt x="3207476" y="2335361"/>
-                  </a:lnTo>
-                  <a:lnTo>
-                    <a:pt x="3283945" y="2403840"/>
-                  </a:lnTo>
-                  <a:lnTo>
-                    <a:pt x="3360413" y="2448458"/>
-                  </a:lnTo>
-                  <a:lnTo>
-                    <a:pt x="3436881" y="2453457"/>
-                  </a:lnTo>
-                  <a:lnTo>
-                    <a:pt x="3513350" y="2458422"/>
-                  </a:lnTo>
-                  <a:lnTo>
-                    <a:pt x="3589818" y="2463355"/>
-                  </a:lnTo>
-                  <a:lnTo>
-                    <a:pt x="3666287" y="2468256"/>
-                  </a:lnTo>
-                  <a:lnTo>
-                    <a:pt x="3742755" y="2473125"/>
-                  </a:lnTo>
-                  <a:lnTo>
-                    <a:pt x="3819224" y="2477961"/>
-                  </a:lnTo>
-                  <a:lnTo>
-                    <a:pt x="3895692" y="2482766"/>
-                  </a:lnTo>
-                  <a:lnTo>
-                    <a:pt x="3972160" y="2487540"/>
-                  </a:lnTo>
-                  <a:lnTo>
-                    <a:pt x="4048629" y="2492282"/>
-                  </a:lnTo>
-                  <a:lnTo>
-                    <a:pt x="4125097" y="2496993"/>
-                  </a:lnTo>
-                  <a:lnTo>
-                    <a:pt x="4201566" y="2501674"/>
-                  </a:lnTo>
-                  <a:lnTo>
-                    <a:pt x="4278034" y="2506323"/>
-                  </a:lnTo>
-                  <a:lnTo>
-                    <a:pt x="4354503" y="2510942"/>
-                  </a:lnTo>
-                  <a:lnTo>
-                    <a:pt x="4430971" y="2515531"/>
-                  </a:lnTo>
-                  <a:lnTo>
-                    <a:pt x="4507439" y="2520090"/>
-                  </a:lnTo>
-                  <a:lnTo>
-                    <a:pt x="4583908" y="2524619"/>
-                  </a:lnTo>
-                  <a:lnTo>
-                    <a:pt x="4660376" y="2529119"/>
-                  </a:lnTo>
-                  <a:lnTo>
-                    <a:pt x="4736845" y="2533589"/>
-                  </a:lnTo>
-                  <a:lnTo>
-                    <a:pt x="4813313" y="2538029"/>
-                  </a:lnTo>
-                  <a:lnTo>
-                    <a:pt x="4889782" y="2542441"/>
-                  </a:lnTo>
-                  <a:lnTo>
-                    <a:pt x="4966250" y="2546823"/>
-                  </a:lnTo>
-                  <a:lnTo>
-                    <a:pt x="5042719" y="2551177"/>
-                  </a:lnTo>
-                  <a:lnTo>
-                    <a:pt x="5119187" y="2555502"/>
-                  </a:lnTo>
-                  <a:lnTo>
-                    <a:pt x="5195655" y="2559800"/>
-                  </a:lnTo>
-                  <a:lnTo>
-                    <a:pt x="5272124" y="2564068"/>
-                  </a:lnTo>
-                  <a:lnTo>
-                    <a:pt x="5348592" y="2568309"/>
-                  </a:lnTo>
-                  <a:lnTo>
-                    <a:pt x="5425061" y="2572522"/>
-                  </a:lnTo>
-                  <a:lnTo>
-                    <a:pt x="5501529" y="2576708"/>
-                  </a:lnTo>
-                  <a:lnTo>
-                    <a:pt x="5577998" y="2580866"/>
-                  </a:lnTo>
-                  <a:lnTo>
-                    <a:pt x="5654466" y="2584997"/>
-                  </a:lnTo>
-                  <a:lnTo>
-                    <a:pt x="5730934" y="2589101"/>
-                  </a:lnTo>
-                  <a:lnTo>
-                    <a:pt x="5807403" y="2593178"/>
-                  </a:lnTo>
-                  <a:lnTo>
-                    <a:pt x="5883871" y="2597228"/>
-                  </a:lnTo>
-                  <a:lnTo>
-                    <a:pt x="5960340" y="2601252"/>
-                  </a:lnTo>
-                  <a:lnTo>
-                    <a:pt x="6036808" y="2605249"/>
-                  </a:lnTo>
-                  <a:lnTo>
-                    <a:pt x="6113277" y="2609220"/>
-                  </a:lnTo>
-                  <a:lnTo>
-                    <a:pt x="6189745" y="2613165"/>
-                  </a:lnTo>
-                  <a:lnTo>
-                    <a:pt x="6266213" y="2617085"/>
-                  </a:lnTo>
-                  <a:lnTo>
-                    <a:pt x="6342682" y="2620978"/>
-                  </a:lnTo>
-                  <a:lnTo>
-                    <a:pt x="6419150" y="2624846"/>
-                  </a:lnTo>
-                  <a:lnTo>
-                    <a:pt x="6495619" y="2628689"/>
-                  </a:lnTo>
-                  <a:lnTo>
-                    <a:pt x="6572087" y="2632507"/>
-                  </a:lnTo>
-                  <a:lnTo>
-                    <a:pt x="6648556" y="2636299"/>
-                  </a:lnTo>
-                  <a:lnTo>
-                    <a:pt x="6725024" y="2640067"/>
-                  </a:lnTo>
-                  <a:lnTo>
-                    <a:pt x="6801492" y="2643810"/>
-                  </a:lnTo>
-                  <a:lnTo>
-                    <a:pt x="6877961" y="2647529"/>
-                  </a:lnTo>
-                  <a:lnTo>
-                    <a:pt x="6954429" y="2651223"/>
-                  </a:lnTo>
-                  <a:lnTo>
-                    <a:pt x="7030898" y="2654893"/>
-                  </a:lnTo>
-                  <a:lnTo>
-                    <a:pt x="7107366" y="2658539"/>
-                  </a:lnTo>
-                  <a:lnTo>
-                    <a:pt x="7183835" y="2662161"/>
-                  </a:lnTo>
-                  <a:lnTo>
-                    <a:pt x="7260303" y="2665759"/>
-                  </a:lnTo>
-                  <a:lnTo>
-                    <a:pt x="7260303" y="3199713"/>
-                  </a:lnTo>
-                  <a:lnTo>
-                    <a:pt x="7183835" y="3198719"/>
-                  </a:lnTo>
-                  <a:lnTo>
-                    <a:pt x="7107366" y="3197640"/>
-                  </a:lnTo>
-                  <a:lnTo>
-                    <a:pt x="7030898" y="3196470"/>
-                  </a:lnTo>
-                  <a:lnTo>
-                    <a:pt x="6954429" y="3195201"/>
-                  </a:lnTo>
-                  <a:lnTo>
-                    <a:pt x="6877961" y="3193824"/>
-                  </a:lnTo>
-                  <a:lnTo>
-                    <a:pt x="6801492" y="3192330"/>
-                  </a:lnTo>
-                  <a:lnTo>
-                    <a:pt x="6725024" y="3190710"/>
-                  </a:lnTo>
-                  <a:lnTo>
-                    <a:pt x="6648556" y="3188952"/>
-                  </a:lnTo>
-                  <a:lnTo>
-                    <a:pt x="6572087" y="3187046"/>
-                  </a:lnTo>
-                  <a:lnTo>
-                    <a:pt x="6495619" y="3184977"/>
-                  </a:lnTo>
-                  <a:lnTo>
-                    <a:pt x="6419150" y="3182734"/>
-                  </a:lnTo>
-                  <a:lnTo>
-                    <a:pt x="6342682" y="3180300"/>
-                  </a:lnTo>
-                  <a:lnTo>
-                    <a:pt x="6266213" y="3177659"/>
-                  </a:lnTo>
-                  <a:lnTo>
-                    <a:pt x="6189745" y="3174795"/>
-                  </a:lnTo>
-                  <a:lnTo>
-                    <a:pt x="6113277" y="3171688"/>
-                  </a:lnTo>
-                  <a:lnTo>
-                    <a:pt x="6036808" y="3168317"/>
-                  </a:lnTo>
-                  <a:lnTo>
-                    <a:pt x="5960340" y="3164660"/>
-                  </a:lnTo>
-                  <a:lnTo>
-                    <a:pt x="5883871" y="3160694"/>
-                  </a:lnTo>
-                  <a:lnTo>
-                    <a:pt x="5807403" y="3156391"/>
-                  </a:lnTo>
-                  <a:lnTo>
-                    <a:pt x="5730934" y="3151723"/>
-                  </a:lnTo>
-                  <a:lnTo>
-                    <a:pt x="5654466" y="3146660"/>
-                  </a:lnTo>
-                  <a:lnTo>
-                    <a:pt x="5577998" y="3141167"/>
-                  </a:lnTo>
-                  <a:lnTo>
-                    <a:pt x="5501529" y="3135208"/>
-                  </a:lnTo>
-                  <a:lnTo>
-                    <a:pt x="5425061" y="3128744"/>
-                  </a:lnTo>
-                  <a:lnTo>
-                    <a:pt x="5348592" y="3121732"/>
-                  </a:lnTo>
-                  <a:lnTo>
-                    <a:pt x="5272124" y="3114126"/>
-                  </a:lnTo>
-                  <a:lnTo>
-                    <a:pt x="5195655" y="3105874"/>
-                  </a:lnTo>
-                  <a:lnTo>
-                    <a:pt x="5119187" y="3096923"/>
-                  </a:lnTo>
-                  <a:lnTo>
-                    <a:pt x="5042719" y="3087213"/>
-                  </a:lnTo>
-                  <a:lnTo>
-                    <a:pt x="4966250" y="3076679"/>
-                  </a:lnTo>
-                  <a:lnTo>
-                    <a:pt x="4889782" y="3065252"/>
-                  </a:lnTo>
-                  <a:lnTo>
-                    <a:pt x="4813313" y="3052857"/>
-                  </a:lnTo>
-                  <a:lnTo>
-                    <a:pt x="4736845" y="3039410"/>
-                  </a:lnTo>
-                  <a:lnTo>
-                    <a:pt x="4660376" y="3024823"/>
-                  </a:lnTo>
-                  <a:lnTo>
-                    <a:pt x="4583908" y="3008999"/>
-                  </a:lnTo>
-                  <a:lnTo>
-                    <a:pt x="4507439" y="2991834"/>
-                  </a:lnTo>
-                  <a:lnTo>
-                    <a:pt x="4430971" y="2973213"/>
-                  </a:lnTo>
-                  <a:lnTo>
-                    <a:pt x="4354503" y="2953013"/>
-                  </a:lnTo>
-                  <a:lnTo>
-                    <a:pt x="4278034" y="2931100"/>
-                  </a:lnTo>
-                  <a:lnTo>
-                    <a:pt x="4201566" y="2907329"/>
-                  </a:lnTo>
-                  <a:lnTo>
-                    <a:pt x="4125097" y="2881542"/>
-                  </a:lnTo>
-                  <a:lnTo>
-                    <a:pt x="4048629" y="2853569"/>
-                  </a:lnTo>
-                  <a:lnTo>
-                    <a:pt x="3972160" y="2823224"/>
-                  </a:lnTo>
-                  <a:lnTo>
-                    <a:pt x="3895692" y="2790306"/>
-                  </a:lnTo>
-                  <a:lnTo>
-                    <a:pt x="3819224" y="2754597"/>
-                  </a:lnTo>
-                  <a:lnTo>
-                    <a:pt x="3742755" y="2715859"/>
-                  </a:lnTo>
-                  <a:lnTo>
-                    <a:pt x="3666287" y="2673837"/>
-                  </a:lnTo>
-                  <a:lnTo>
-                    <a:pt x="3589818" y="2628252"/>
-                  </a:lnTo>
-                  <a:lnTo>
-                    <a:pt x="3513350" y="2578802"/>
-                  </a:lnTo>
-                  <a:lnTo>
-                    <a:pt x="3436881" y="2525158"/>
-                  </a:lnTo>
-                  <a:lnTo>
-                    <a:pt x="3360413" y="2466966"/>
-                  </a:lnTo>
-                  <a:lnTo>
-                    <a:pt x="3283945" y="2443427"/>
-                  </a:lnTo>
-                  <a:lnTo>
-                    <a:pt x="3207476" y="2438363"/>
-                  </a:lnTo>
-                  <a:lnTo>
-                    <a:pt x="3131008" y="2433265"/>
-                  </a:lnTo>
-                  <a:lnTo>
-                    <a:pt x="3054539" y="2428133"/>
-                  </a:lnTo>
-                  <a:lnTo>
-                    <a:pt x="2978071" y="2422968"/>
-                  </a:lnTo>
-                  <a:lnTo>
-                    <a:pt x="2901602" y="2417769"/>
-                  </a:lnTo>
-                  <a:lnTo>
-                    <a:pt x="2825134" y="2412535"/>
-                  </a:lnTo>
-                  <a:lnTo>
-                    <a:pt x="2748666" y="2407267"/>
-                  </a:lnTo>
-                  <a:lnTo>
-                    <a:pt x="2672197" y="2401964"/>
-                  </a:lnTo>
-                  <a:lnTo>
-                    <a:pt x="2595729" y="2396626"/>
-                  </a:lnTo>
-                  <a:lnTo>
-                    <a:pt x="2519260" y="2391253"/>
-                  </a:lnTo>
-                  <a:lnTo>
-                    <a:pt x="2442792" y="2385845"/>
-                  </a:lnTo>
-                  <a:lnTo>
-                    <a:pt x="2366323" y="2380401"/>
-                  </a:lnTo>
-                  <a:lnTo>
-                    <a:pt x="2289855" y="2374921"/>
-                  </a:lnTo>
-                  <a:lnTo>
-                    <a:pt x="2213386" y="2369405"/>
-                  </a:lnTo>
-                  <a:lnTo>
-                    <a:pt x="2136918" y="2363852"/>
-                  </a:lnTo>
-                  <a:lnTo>
-                    <a:pt x="2060450" y="2358263"/>
-                  </a:lnTo>
-                  <a:lnTo>
-                    <a:pt x="1983981" y="2352637"/>
-                  </a:lnTo>
-                  <a:lnTo>
-                    <a:pt x="1907513" y="2346974"/>
-                  </a:lnTo>
-                  <a:lnTo>
-                    <a:pt x="1831044" y="2341273"/>
-                  </a:lnTo>
-                  <a:lnTo>
-                    <a:pt x="1754576" y="2335535"/>
-                  </a:lnTo>
-                  <a:lnTo>
-                    <a:pt x="1678107" y="2329759"/>
-                  </a:lnTo>
-                  <a:lnTo>
-                    <a:pt x="1601639" y="2323946"/>
-                  </a:lnTo>
-                  <a:lnTo>
-                    <a:pt x="1525171" y="2318093"/>
-                  </a:lnTo>
-                  <a:lnTo>
-                    <a:pt x="1448702" y="2312202"/>
-                  </a:lnTo>
-                  <a:lnTo>
-                    <a:pt x="1372234" y="2306273"/>
-                  </a:lnTo>
-                  <a:lnTo>
-                    <a:pt x="1295765" y="2300304"/>
-                  </a:lnTo>
-                  <a:lnTo>
-                    <a:pt x="1219297" y="2294296"/>
-                  </a:lnTo>
-                  <a:lnTo>
-                    <a:pt x="1142828" y="2288248"/>
-                  </a:lnTo>
-                  <a:lnTo>
-                    <a:pt x="1066360" y="2282160"/>
-                  </a:lnTo>
-                  <a:lnTo>
-                    <a:pt x="989892" y="2276032"/>
-                  </a:lnTo>
-                  <a:lnTo>
-                    <a:pt x="913423" y="2269864"/>
-                  </a:lnTo>
-                  <a:lnTo>
-                    <a:pt x="836955" y="2263655"/>
-                  </a:lnTo>
-                  <a:lnTo>
-                    <a:pt x="760486" y="2257405"/>
-                  </a:lnTo>
-                  <a:lnTo>
-                    <a:pt x="684018" y="2251114"/>
-                  </a:lnTo>
-                  <a:lnTo>
-                    <a:pt x="607549" y="2244781"/>
-                  </a:lnTo>
-                  <a:lnTo>
-                    <a:pt x="531081" y="2238407"/>
-                  </a:lnTo>
-                  <a:lnTo>
-                    <a:pt x="454613" y="2231991"/>
-                  </a:lnTo>
-                  <a:lnTo>
-                    <a:pt x="378144" y="2225532"/>
-                  </a:lnTo>
-                  <a:lnTo>
-                    <a:pt x="301676" y="2219031"/>
-                  </a:lnTo>
-                  <a:lnTo>
-                    <a:pt x="225207" y="2212487"/>
-                  </a:lnTo>
-                  <a:lnTo>
-                    <a:pt x="148739" y="2205899"/>
-                  </a:lnTo>
-                  <a:lnTo>
-                    <a:pt x="72270" y="2199269"/>
-                  </a:lnTo>
-                  <a:lnTo>
-                    <a:pt x="0" y="2192961"/>
+                    <a:pt x="2060450" y="246048"/>
+                  </a:lnTo>
+                  <a:lnTo>
+                    <a:pt x="2136918" y="482574"/>
+                  </a:lnTo>
+                  <a:lnTo>
+                    <a:pt x="2213386" y="700612"/>
+                  </a:lnTo>
+                  <a:lnTo>
+                    <a:pt x="2289855" y="901607"/>
+                  </a:lnTo>
+                  <a:lnTo>
+                    <a:pt x="2366323" y="1086891"/>
+                  </a:lnTo>
+                  <a:lnTo>
+                    <a:pt x="2442792" y="1257692"/>
+                  </a:lnTo>
+                  <a:lnTo>
+                    <a:pt x="2519260" y="1415143"/>
+                  </a:lnTo>
+                  <a:lnTo>
+                    <a:pt x="2595729" y="1560286"/>
+                  </a:lnTo>
+                  <a:lnTo>
+                    <a:pt x="2672197" y="1694084"/>
+                  </a:lnTo>
+                  <a:lnTo>
+                    <a:pt x="2748666" y="1817424"/>
+                  </a:lnTo>
+                  <a:lnTo>
+                    <a:pt x="2825134" y="1931123"/>
+                  </a:lnTo>
+                  <a:lnTo>
+                    <a:pt x="2901602" y="2035934"/>
+                  </a:lnTo>
+                  <a:lnTo>
+                    <a:pt x="2978071" y="2132553"/>
+                  </a:lnTo>
+                  <a:lnTo>
+                    <a:pt x="3054539" y="2221619"/>
+                  </a:lnTo>
+                  <a:lnTo>
+                    <a:pt x="3131008" y="2303724"/>
+                  </a:lnTo>
+                  <a:lnTo>
+                    <a:pt x="3207476" y="2379411"/>
+                  </a:lnTo>
+                  <a:lnTo>
+                    <a:pt x="3283945" y="2449182"/>
+                  </a:lnTo>
+                  <a:lnTo>
+                    <a:pt x="3360413" y="2494642"/>
+                  </a:lnTo>
+                  <a:lnTo>
+                    <a:pt x="3436881" y="2499734"/>
+                  </a:lnTo>
+                  <a:lnTo>
+                    <a:pt x="3513350" y="2504794"/>
+                  </a:lnTo>
+                  <a:lnTo>
+                    <a:pt x="3589818" y="2509820"/>
+                  </a:lnTo>
+                  <a:lnTo>
+                    <a:pt x="3666287" y="2514813"/>
+                  </a:lnTo>
+                  <a:lnTo>
+                    <a:pt x="3742755" y="2519773"/>
+                  </a:lnTo>
+                  <a:lnTo>
+                    <a:pt x="3819224" y="2524701"/>
+                  </a:lnTo>
+                  <a:lnTo>
+                    <a:pt x="3895692" y="2529597"/>
+                  </a:lnTo>
+                  <a:lnTo>
+                    <a:pt x="3972160" y="2534460"/>
+                  </a:lnTo>
+                  <a:lnTo>
+                    <a:pt x="4048629" y="2539292"/>
+                  </a:lnTo>
+                  <a:lnTo>
+                    <a:pt x="4125097" y="2544092"/>
+                  </a:lnTo>
+                  <a:lnTo>
+                    <a:pt x="4201566" y="2548861"/>
+                  </a:lnTo>
+                  <a:lnTo>
+                    <a:pt x="4278034" y="2553598"/>
+                  </a:lnTo>
+                  <a:lnTo>
+                    <a:pt x="4354503" y="2558304"/>
+                  </a:lnTo>
+                  <a:lnTo>
+                    <a:pt x="4430971" y="2562980"/>
+                  </a:lnTo>
+                  <a:lnTo>
+                    <a:pt x="4507439" y="2567625"/>
+                  </a:lnTo>
+                  <a:lnTo>
+                    <a:pt x="4583908" y="2572239"/>
+                  </a:lnTo>
+                  <a:lnTo>
+                    <a:pt x="4660376" y="2576823"/>
+                  </a:lnTo>
+                  <a:lnTo>
+                    <a:pt x="4736845" y="2581378"/>
+                  </a:lnTo>
+                  <a:lnTo>
+                    <a:pt x="4813313" y="2585902"/>
+                  </a:lnTo>
+                  <a:lnTo>
+                    <a:pt x="4889782" y="2590397"/>
+                  </a:lnTo>
+                  <a:lnTo>
+                    <a:pt x="4966250" y="2594862"/>
+                  </a:lnTo>
+                  <a:lnTo>
+                    <a:pt x="5042719" y="2599298"/>
+                  </a:lnTo>
+                  <a:lnTo>
+                    <a:pt x="5119187" y="2603705"/>
+                  </a:lnTo>
+                  <a:lnTo>
+                    <a:pt x="5195655" y="2608083"/>
+                  </a:lnTo>
+                  <a:lnTo>
+                    <a:pt x="5272124" y="2612432"/>
+                  </a:lnTo>
+                  <a:lnTo>
+                    <a:pt x="5348592" y="2616753"/>
+                  </a:lnTo>
+                  <a:lnTo>
+                    <a:pt x="5425061" y="2621046"/>
+                  </a:lnTo>
+                  <a:lnTo>
+                    <a:pt x="5501529" y="2625310"/>
+                  </a:lnTo>
+                  <a:lnTo>
+                    <a:pt x="5577998" y="2629547"/>
+                  </a:lnTo>
+                  <a:lnTo>
+                    <a:pt x="5654466" y="2633756"/>
+                  </a:lnTo>
+                  <a:lnTo>
+                    <a:pt x="5730934" y="2637937"/>
+                  </a:lnTo>
+                  <a:lnTo>
+                    <a:pt x="5807403" y="2642091"/>
+                  </a:lnTo>
+                  <a:lnTo>
+                    <a:pt x="5883871" y="2646217"/>
+                  </a:lnTo>
+                  <a:lnTo>
+                    <a:pt x="5960340" y="2650317"/>
+                  </a:lnTo>
+                  <a:lnTo>
+                    <a:pt x="6036808" y="2654390"/>
+                  </a:lnTo>
+                  <a:lnTo>
+                    <a:pt x="6113277" y="2658436"/>
+                  </a:lnTo>
+                  <a:lnTo>
+                    <a:pt x="6189745" y="2662455"/>
+                  </a:lnTo>
+                  <a:lnTo>
+                    <a:pt x="6266213" y="2666449"/>
+                  </a:lnTo>
+                  <a:lnTo>
+                    <a:pt x="6342682" y="2670416"/>
+                  </a:lnTo>
+                  <a:lnTo>
+                    <a:pt x="6419150" y="2674357"/>
+                  </a:lnTo>
+                  <a:lnTo>
+                    <a:pt x="6495619" y="2678272"/>
+                  </a:lnTo>
+                  <a:lnTo>
+                    <a:pt x="6572087" y="2682162"/>
+                  </a:lnTo>
+                  <a:lnTo>
+                    <a:pt x="6648556" y="2686026"/>
+                  </a:lnTo>
+                  <a:lnTo>
+                    <a:pt x="6725024" y="2689864"/>
+                  </a:lnTo>
+                  <a:lnTo>
+                    <a:pt x="6801492" y="2693678"/>
+                  </a:lnTo>
+                  <a:lnTo>
+                    <a:pt x="6877961" y="2697467"/>
+                  </a:lnTo>
+                  <a:lnTo>
+                    <a:pt x="6954429" y="2701231"/>
+                  </a:lnTo>
+                  <a:lnTo>
+                    <a:pt x="7030898" y="2704970"/>
+                  </a:lnTo>
+                  <a:lnTo>
+                    <a:pt x="7107366" y="2708685"/>
+                  </a:lnTo>
+                  <a:lnTo>
+                    <a:pt x="7183835" y="2712375"/>
+                  </a:lnTo>
+                  <a:lnTo>
+                    <a:pt x="7260303" y="2716041"/>
+                  </a:lnTo>
+                  <a:lnTo>
+                    <a:pt x="7260303" y="3260067"/>
+                  </a:lnTo>
+                  <a:lnTo>
+                    <a:pt x="7183835" y="3259054"/>
+                  </a:lnTo>
+                  <a:lnTo>
+                    <a:pt x="7107366" y="3257955"/>
+                  </a:lnTo>
+                  <a:lnTo>
+                    <a:pt x="7030898" y="3256763"/>
+                  </a:lnTo>
+                  <a:lnTo>
+                    <a:pt x="6954429" y="3255470"/>
+                  </a:lnTo>
+                  <a:lnTo>
+                    <a:pt x="6877961" y="3254067"/>
+                  </a:lnTo>
+                  <a:lnTo>
+                    <a:pt x="6801492" y="3252545"/>
+                  </a:lnTo>
+                  <a:lnTo>
+                    <a:pt x="6725024" y="3250894"/>
+                  </a:lnTo>
+                  <a:lnTo>
+                    <a:pt x="6648556" y="3249103"/>
+                  </a:lnTo>
+                  <a:lnTo>
+                    <a:pt x="6572087" y="3247160"/>
+                  </a:lnTo>
+                  <a:lnTo>
+                    <a:pt x="6495619" y="3245053"/>
+                  </a:lnTo>
+                  <a:lnTo>
+                    <a:pt x="6419150" y="3242767"/>
+                  </a:lnTo>
+                  <a:lnTo>
+                    <a:pt x="6342682" y="3240287"/>
+                  </a:lnTo>
+                  <a:lnTo>
+                    <a:pt x="6266213" y="3237597"/>
+                  </a:lnTo>
+                  <a:lnTo>
+                    <a:pt x="6189745" y="3234678"/>
+                  </a:lnTo>
+                  <a:lnTo>
+                    <a:pt x="6113277" y="3231513"/>
+                  </a:lnTo>
+                  <a:lnTo>
+                    <a:pt x="6036808" y="3228078"/>
+                  </a:lnTo>
+                  <a:lnTo>
+                    <a:pt x="5960340" y="3224353"/>
+                  </a:lnTo>
+                  <a:lnTo>
+                    <a:pt x="5883871" y="3220311"/>
+                  </a:lnTo>
+                  <a:lnTo>
+                    <a:pt x="5807403" y="3215927"/>
+                  </a:lnTo>
+                  <a:lnTo>
+                    <a:pt x="5730934" y="3211172"/>
+                  </a:lnTo>
+                  <a:lnTo>
+                    <a:pt x="5654466" y="3206013"/>
+                  </a:lnTo>
+                  <a:lnTo>
+                    <a:pt x="5577998" y="3200416"/>
+                  </a:lnTo>
+                  <a:lnTo>
+                    <a:pt x="5501529" y="3194345"/>
+                  </a:lnTo>
+                  <a:lnTo>
+                    <a:pt x="5425061" y="3187759"/>
+                  </a:lnTo>
+                  <a:lnTo>
+                    <a:pt x="5348592" y="3180615"/>
+                  </a:lnTo>
+                  <a:lnTo>
+                    <a:pt x="5272124" y="3172865"/>
+                  </a:lnTo>
+                  <a:lnTo>
+                    <a:pt x="5195655" y="3164458"/>
+                  </a:lnTo>
+                  <a:lnTo>
+                    <a:pt x="5119187" y="3155338"/>
+                  </a:lnTo>
+                  <a:lnTo>
+                    <a:pt x="5042719" y="3145444"/>
+                  </a:lnTo>
+                  <a:lnTo>
+                    <a:pt x="4966250" y="3134712"/>
+                  </a:lnTo>
+                  <a:lnTo>
+                    <a:pt x="4889782" y="3123070"/>
+                  </a:lnTo>
+                  <a:lnTo>
+                    <a:pt x="4813313" y="3110440"/>
+                  </a:lnTo>
+                  <a:lnTo>
+                    <a:pt x="4736845" y="3096740"/>
+                  </a:lnTo>
+                  <a:lnTo>
+                    <a:pt x="4660376" y="3081878"/>
+                  </a:lnTo>
+                  <a:lnTo>
+                    <a:pt x="4583908" y="3065756"/>
+                  </a:lnTo>
+                  <a:lnTo>
+                    <a:pt x="4507439" y="3048266"/>
+                  </a:lnTo>
+                  <a:lnTo>
+                    <a:pt x="4430971" y="3029294"/>
+                  </a:lnTo>
+                  <a:lnTo>
+                    <a:pt x="4354503" y="3008713"/>
+                  </a:lnTo>
+                  <a:lnTo>
+                    <a:pt x="4278034" y="2986387"/>
+                  </a:lnTo>
+                  <a:lnTo>
+                    <a:pt x="4201566" y="2962167"/>
+                  </a:lnTo>
+                  <a:lnTo>
+                    <a:pt x="4125097" y="2935894"/>
+                  </a:lnTo>
+                  <a:lnTo>
+                    <a:pt x="4048629" y="2907394"/>
+                  </a:lnTo>
+                  <a:lnTo>
+                    <a:pt x="3972160" y="2876476"/>
+                  </a:lnTo>
+                  <a:lnTo>
+                    <a:pt x="3895692" y="2842937"/>
+                  </a:lnTo>
+                  <a:lnTo>
+                    <a:pt x="3819224" y="2806554"/>
+                  </a:lnTo>
+                  <a:lnTo>
+                    <a:pt x="3742755" y="2767086"/>
+                  </a:lnTo>
+                  <a:lnTo>
+                    <a:pt x="3666287" y="2724272"/>
+                  </a:lnTo>
+                  <a:lnTo>
+                    <a:pt x="3589818" y="2677827"/>
+                  </a:lnTo>
+                  <a:lnTo>
+                    <a:pt x="3513350" y="2627444"/>
+                  </a:lnTo>
+                  <a:lnTo>
+                    <a:pt x="3436881" y="2572789"/>
+                  </a:lnTo>
+                  <a:lnTo>
+                    <a:pt x="3360413" y="2513499"/>
+                  </a:lnTo>
+                  <a:lnTo>
+                    <a:pt x="3283945" y="2489516"/>
+                  </a:lnTo>
+                  <a:lnTo>
+                    <a:pt x="3207476" y="2484356"/>
+                  </a:lnTo>
+                  <a:lnTo>
+                    <a:pt x="3131008" y="2479162"/>
+                  </a:lnTo>
+                  <a:lnTo>
+                    <a:pt x="3054539" y="2473933"/>
+                  </a:lnTo>
+                  <a:lnTo>
+                    <a:pt x="2978071" y="2468671"/>
+                  </a:lnTo>
+                  <a:lnTo>
+                    <a:pt x="2901602" y="2463373"/>
+                  </a:lnTo>
+                  <a:lnTo>
+                    <a:pt x="2825134" y="2458041"/>
+                  </a:lnTo>
+                  <a:lnTo>
+                    <a:pt x="2748666" y="2452674"/>
+                  </a:lnTo>
+                  <a:lnTo>
+                    <a:pt x="2672197" y="2447271"/>
+                  </a:lnTo>
+                  <a:lnTo>
+                    <a:pt x="2595729" y="2441832"/>
+                  </a:lnTo>
+                  <a:lnTo>
+                    <a:pt x="2519260" y="2436358"/>
+                  </a:lnTo>
+                  <a:lnTo>
+                    <a:pt x="2442792" y="2430847"/>
+                  </a:lnTo>
+                  <a:lnTo>
+                    <a:pt x="2366323" y="2425300"/>
+                  </a:lnTo>
+                  <a:lnTo>
+                    <a:pt x="2289855" y="2419717"/>
+                  </a:lnTo>
+                  <a:lnTo>
+                    <a:pt x="2213386" y="2414097"/>
+                  </a:lnTo>
+                  <a:lnTo>
+                    <a:pt x="2136918" y="2408440"/>
+                  </a:lnTo>
+                  <a:lnTo>
+                    <a:pt x="2060450" y="2402745"/>
+                  </a:lnTo>
+                  <a:lnTo>
+                    <a:pt x="1983981" y="2397013"/>
+                  </a:lnTo>
+                  <a:lnTo>
+                    <a:pt x="1907513" y="2391243"/>
+                  </a:lnTo>
+                  <a:lnTo>
+                    <a:pt x="1831044" y="2385435"/>
+                  </a:lnTo>
+                  <a:lnTo>
+                    <a:pt x="1754576" y="2379589"/>
+                  </a:lnTo>
+                  <a:lnTo>
+                    <a:pt x="1678107" y="2373704"/>
+                  </a:lnTo>
+                  <a:lnTo>
+                    <a:pt x="1601639" y="2367780"/>
+                  </a:lnTo>
+                  <a:lnTo>
+                    <a:pt x="1525171" y="2361818"/>
+                  </a:lnTo>
+                  <a:lnTo>
+                    <a:pt x="1448702" y="2355816"/>
+                  </a:lnTo>
+                  <a:lnTo>
+                    <a:pt x="1372234" y="2349774"/>
+                  </a:lnTo>
+                  <a:lnTo>
+                    <a:pt x="1295765" y="2343693"/>
+                  </a:lnTo>
+                  <a:lnTo>
+                    <a:pt x="1219297" y="2337571"/>
+                  </a:lnTo>
+                  <a:lnTo>
+                    <a:pt x="1142828" y="2331409"/>
+                  </a:lnTo>
+                  <a:lnTo>
+                    <a:pt x="1066360" y="2325207"/>
+                  </a:lnTo>
+                  <a:lnTo>
+                    <a:pt x="989892" y="2318963"/>
+                  </a:lnTo>
+                  <a:lnTo>
+                    <a:pt x="913423" y="2312679"/>
+                  </a:lnTo>
+                  <a:lnTo>
+                    <a:pt x="836955" y="2306353"/>
+                  </a:lnTo>
+                  <a:lnTo>
+                    <a:pt x="760486" y="2299985"/>
+                  </a:lnTo>
+                  <a:lnTo>
+                    <a:pt x="684018" y="2293575"/>
+                  </a:lnTo>
+                  <a:lnTo>
+                    <a:pt x="607549" y="2287123"/>
+                  </a:lnTo>
+                  <a:lnTo>
+                    <a:pt x="531081" y="2280628"/>
+                  </a:lnTo>
+                  <a:lnTo>
+                    <a:pt x="454613" y="2274091"/>
+                  </a:lnTo>
+                  <a:lnTo>
+                    <a:pt x="378144" y="2267511"/>
+                  </a:lnTo>
+                  <a:lnTo>
+                    <a:pt x="301676" y="2260887"/>
+                  </a:lnTo>
+                  <a:lnTo>
+                    <a:pt x="225207" y="2254219"/>
+                  </a:lnTo>
+                  <a:lnTo>
+                    <a:pt x="148739" y="2247508"/>
+                  </a:lnTo>
+                  <a:lnTo>
+                    <a:pt x="72270" y="2240752"/>
+                  </a:lnTo>
+                  <a:lnTo>
+                    <a:pt x="0" y="2234325"/>
                   </a:lnTo>
                   <a:lnTo>
                     <a:pt x="0" y="0"/>
@@ -3528,228 +3915,228 @@
         </p:sp>
         <p:sp>
           <p:nvSpPr>
-            <p:cNvPr id="22" name="pl22"/>
+            <p:cNvPr id="31" name="pl31"/>
             <p:cNvSpPr/>
             <p:nvPr/>
           </p:nvSpPr>
           <p:spPr>
             <a:xfrm>
-              <a:off x="2902766" y="2209169"/>
-              <a:ext cx="5273182" cy="2665759"/>
+              <a:off x="2902766" y="2185486"/>
+              <a:ext cx="5273182" cy="2716041"/>
             </a:xfrm>
             <a:custGeom>
               <a:avLst/>
               <a:pathLst>
-                <a:path w="5273182" h="2665759">
+                <a:path w="5273182" h="2716041">
                   <a:moveTo>
                     <a:pt x="0" y="0"/>
                   </a:moveTo>
                   <a:lnTo>
-                    <a:pt x="73329" y="241493"/>
-                  </a:lnTo>
-                  <a:lnTo>
-                    <a:pt x="149797" y="473640"/>
-                  </a:lnTo>
-                  <a:lnTo>
-                    <a:pt x="226265" y="687641"/>
-                  </a:lnTo>
-                  <a:lnTo>
-                    <a:pt x="302734" y="884915"/>
-                  </a:lnTo>
-                  <a:lnTo>
-                    <a:pt x="379202" y="1066769"/>
-                  </a:lnTo>
-                  <a:lnTo>
-                    <a:pt x="455671" y="1234409"/>
-                  </a:lnTo>
-                  <a:lnTo>
-                    <a:pt x="532139" y="1388944"/>
-                  </a:lnTo>
-                  <a:lnTo>
-                    <a:pt x="608608" y="1531400"/>
-                  </a:lnTo>
-                  <a:lnTo>
-                    <a:pt x="685076" y="1662721"/>
-                  </a:lnTo>
-                  <a:lnTo>
-                    <a:pt x="761544" y="1783778"/>
-                  </a:lnTo>
-                  <a:lnTo>
-                    <a:pt x="838013" y="1895372"/>
-                  </a:lnTo>
-                  <a:lnTo>
-                    <a:pt x="914481" y="1998243"/>
-                  </a:lnTo>
-                  <a:lnTo>
-                    <a:pt x="990950" y="2093073"/>
-                  </a:lnTo>
-                  <a:lnTo>
-                    <a:pt x="1067418" y="2180491"/>
-                  </a:lnTo>
-                  <a:lnTo>
-                    <a:pt x="1143887" y="2261075"/>
-                  </a:lnTo>
-                  <a:lnTo>
-                    <a:pt x="1220355" y="2335361"/>
-                  </a:lnTo>
-                  <a:lnTo>
-                    <a:pt x="1296823" y="2403840"/>
-                  </a:lnTo>
-                  <a:lnTo>
-                    <a:pt x="1373292" y="2448458"/>
-                  </a:lnTo>
-                  <a:lnTo>
-                    <a:pt x="1449760" y="2453457"/>
-                  </a:lnTo>
-                  <a:lnTo>
-                    <a:pt x="1526229" y="2458422"/>
-                  </a:lnTo>
-                  <a:lnTo>
-                    <a:pt x="1602697" y="2463355"/>
-                  </a:lnTo>
-                  <a:lnTo>
-                    <a:pt x="1679166" y="2468256"/>
-                  </a:lnTo>
-                  <a:lnTo>
-                    <a:pt x="1755634" y="2473125"/>
-                  </a:lnTo>
-                  <a:lnTo>
-                    <a:pt x="1832103" y="2477961"/>
-                  </a:lnTo>
-                  <a:lnTo>
-                    <a:pt x="1908571" y="2482766"/>
-                  </a:lnTo>
-                  <a:lnTo>
-                    <a:pt x="1985039" y="2487540"/>
-                  </a:lnTo>
-                  <a:lnTo>
-                    <a:pt x="2061508" y="2492282"/>
-                  </a:lnTo>
-                  <a:lnTo>
-                    <a:pt x="2137976" y="2496993"/>
-                  </a:lnTo>
-                  <a:lnTo>
-                    <a:pt x="2214445" y="2501674"/>
-                  </a:lnTo>
-                  <a:lnTo>
-                    <a:pt x="2290913" y="2506323"/>
-                  </a:lnTo>
-                  <a:lnTo>
-                    <a:pt x="2367382" y="2510942"/>
-                  </a:lnTo>
-                  <a:lnTo>
-                    <a:pt x="2443850" y="2515531"/>
-                  </a:lnTo>
-                  <a:lnTo>
-                    <a:pt x="2520318" y="2520090"/>
-                  </a:lnTo>
-                  <a:lnTo>
-                    <a:pt x="2596787" y="2524619"/>
-                  </a:lnTo>
-                  <a:lnTo>
-                    <a:pt x="2673255" y="2529119"/>
-                  </a:lnTo>
-                  <a:lnTo>
-                    <a:pt x="2749724" y="2533589"/>
-                  </a:lnTo>
-                  <a:lnTo>
-                    <a:pt x="2826192" y="2538029"/>
-                  </a:lnTo>
-                  <a:lnTo>
-                    <a:pt x="2902661" y="2542441"/>
-                  </a:lnTo>
-                  <a:lnTo>
-                    <a:pt x="2979129" y="2546823"/>
-                  </a:lnTo>
-                  <a:lnTo>
-                    <a:pt x="3055597" y="2551177"/>
-                  </a:lnTo>
-                  <a:lnTo>
-                    <a:pt x="3132066" y="2555502"/>
-                  </a:lnTo>
-                  <a:lnTo>
-                    <a:pt x="3208534" y="2559800"/>
-                  </a:lnTo>
-                  <a:lnTo>
-                    <a:pt x="3285003" y="2564068"/>
-                  </a:lnTo>
-                  <a:lnTo>
-                    <a:pt x="3361471" y="2568309"/>
-                  </a:lnTo>
-                  <a:lnTo>
-                    <a:pt x="3437940" y="2572522"/>
-                  </a:lnTo>
-                  <a:lnTo>
-                    <a:pt x="3514408" y="2576708"/>
-                  </a:lnTo>
-                  <a:lnTo>
-                    <a:pt x="3590876" y="2580866"/>
-                  </a:lnTo>
-                  <a:lnTo>
-                    <a:pt x="3667345" y="2584997"/>
-                  </a:lnTo>
-                  <a:lnTo>
-                    <a:pt x="3743813" y="2589101"/>
-                  </a:lnTo>
-                  <a:lnTo>
-                    <a:pt x="3820282" y="2593178"/>
-                  </a:lnTo>
-                  <a:lnTo>
-                    <a:pt x="3896750" y="2597228"/>
-                  </a:lnTo>
-                  <a:lnTo>
-                    <a:pt x="3973219" y="2601252"/>
-                  </a:lnTo>
-                  <a:lnTo>
-                    <a:pt x="4049687" y="2605249"/>
-                  </a:lnTo>
-                  <a:lnTo>
-                    <a:pt x="4126156" y="2609220"/>
-                  </a:lnTo>
-                  <a:lnTo>
-                    <a:pt x="4202624" y="2613165"/>
-                  </a:lnTo>
-                  <a:lnTo>
-                    <a:pt x="4279092" y="2617085"/>
-                  </a:lnTo>
-                  <a:lnTo>
-                    <a:pt x="4355561" y="2620978"/>
-                  </a:lnTo>
-                  <a:lnTo>
-                    <a:pt x="4432029" y="2624846"/>
-                  </a:lnTo>
-                  <a:lnTo>
-                    <a:pt x="4508498" y="2628689"/>
-                  </a:lnTo>
-                  <a:lnTo>
-                    <a:pt x="4584966" y="2632507"/>
-                  </a:lnTo>
-                  <a:lnTo>
-                    <a:pt x="4661435" y="2636299"/>
-                  </a:lnTo>
-                  <a:lnTo>
-                    <a:pt x="4737903" y="2640067"/>
-                  </a:lnTo>
-                  <a:lnTo>
-                    <a:pt x="4814371" y="2643810"/>
-                  </a:lnTo>
-                  <a:lnTo>
-                    <a:pt x="4890840" y="2647529"/>
-                  </a:lnTo>
-                  <a:lnTo>
-                    <a:pt x="4967308" y="2651223"/>
-                  </a:lnTo>
-                  <a:lnTo>
-                    <a:pt x="5043777" y="2654893"/>
-                  </a:lnTo>
-                  <a:lnTo>
-                    <a:pt x="5120245" y="2658539"/>
-                  </a:lnTo>
-                  <a:lnTo>
-                    <a:pt x="5196714" y="2662161"/>
-                  </a:lnTo>
-                  <a:lnTo>
-                    <a:pt x="5273182" y="2665759"/>
+                    <a:pt x="73329" y="246048"/>
+                  </a:lnTo>
+                  <a:lnTo>
+                    <a:pt x="149797" y="482574"/>
+                  </a:lnTo>
+                  <a:lnTo>
+                    <a:pt x="226265" y="700612"/>
+                  </a:lnTo>
+                  <a:lnTo>
+                    <a:pt x="302734" y="901607"/>
+                  </a:lnTo>
+                  <a:lnTo>
+                    <a:pt x="379202" y="1086891"/>
+                  </a:lnTo>
+                  <a:lnTo>
+                    <a:pt x="455671" y="1257692"/>
+                  </a:lnTo>
+                  <a:lnTo>
+                    <a:pt x="532139" y="1415143"/>
+                  </a:lnTo>
+                  <a:lnTo>
+                    <a:pt x="608608" y="1560286"/>
+                  </a:lnTo>
+                  <a:lnTo>
+                    <a:pt x="685076" y="1694084"/>
+                  </a:lnTo>
+                  <a:lnTo>
+                    <a:pt x="761544" y="1817424"/>
+                  </a:lnTo>
+                  <a:lnTo>
+                    <a:pt x="838013" y="1931123"/>
+                  </a:lnTo>
+                  <a:lnTo>
+                    <a:pt x="914481" y="2035934"/>
+                  </a:lnTo>
+                  <a:lnTo>
+                    <a:pt x="990950" y="2132553"/>
+                  </a:lnTo>
+                  <a:lnTo>
+                    <a:pt x="1067418" y="2221619"/>
+                  </a:lnTo>
+                  <a:lnTo>
+                    <a:pt x="1143887" y="2303724"/>
+                  </a:lnTo>
+                  <a:lnTo>
+                    <a:pt x="1220355" y="2379411"/>
+                  </a:lnTo>
+                  <a:lnTo>
+                    <a:pt x="1296823" y="2449182"/>
+                  </a:lnTo>
+                  <a:lnTo>
+                    <a:pt x="1373292" y="2494642"/>
+                  </a:lnTo>
+                  <a:lnTo>
+                    <a:pt x="1449760" y="2499734"/>
+                  </a:lnTo>
+                  <a:lnTo>
+                    <a:pt x="1526229" y="2504794"/>
+                  </a:lnTo>
+                  <a:lnTo>
+                    <a:pt x="1602697" y="2509820"/>
+                  </a:lnTo>
+                  <a:lnTo>
+                    <a:pt x="1679166" y="2514813"/>
+                  </a:lnTo>
+                  <a:lnTo>
+                    <a:pt x="1755634" y="2519773"/>
+                  </a:lnTo>
+                  <a:lnTo>
+                    <a:pt x="1832103" y="2524701"/>
+                  </a:lnTo>
+                  <a:lnTo>
+                    <a:pt x="1908571" y="2529597"/>
+                  </a:lnTo>
+                  <a:lnTo>
+                    <a:pt x="1985039" y="2534460"/>
+                  </a:lnTo>
+                  <a:lnTo>
+                    <a:pt x="2061508" y="2539292"/>
+                  </a:lnTo>
+                  <a:lnTo>
+                    <a:pt x="2137976" y="2544092"/>
+                  </a:lnTo>
+                  <a:lnTo>
+                    <a:pt x="2214445" y="2548861"/>
+                  </a:lnTo>
+                  <a:lnTo>
+                    <a:pt x="2290913" y="2553598"/>
+                  </a:lnTo>
+                  <a:lnTo>
+                    <a:pt x="2367382" y="2558304"/>
+                  </a:lnTo>
+                  <a:lnTo>
+                    <a:pt x="2443850" y="2562980"/>
+                  </a:lnTo>
+                  <a:lnTo>
+                    <a:pt x="2520318" y="2567625"/>
+                  </a:lnTo>
+                  <a:lnTo>
+                    <a:pt x="2596787" y="2572239"/>
+                  </a:lnTo>
+                  <a:lnTo>
+                    <a:pt x="2673255" y="2576823"/>
+                  </a:lnTo>
+                  <a:lnTo>
+                    <a:pt x="2749724" y="2581378"/>
+                  </a:lnTo>
+                  <a:lnTo>
+                    <a:pt x="2826192" y="2585902"/>
+                  </a:lnTo>
+                  <a:lnTo>
+                    <a:pt x="2902661" y="2590397"/>
+                  </a:lnTo>
+                  <a:lnTo>
+                    <a:pt x="2979129" y="2594862"/>
+                  </a:lnTo>
+                  <a:lnTo>
+                    <a:pt x="3055597" y="2599298"/>
+                  </a:lnTo>
+                  <a:lnTo>
+                    <a:pt x="3132066" y="2603705"/>
+                  </a:lnTo>
+                  <a:lnTo>
+                    <a:pt x="3208534" y="2608083"/>
+                  </a:lnTo>
+                  <a:lnTo>
+                    <a:pt x="3285003" y="2612432"/>
+                  </a:lnTo>
+                  <a:lnTo>
+                    <a:pt x="3361471" y="2616753"/>
+                  </a:lnTo>
+                  <a:lnTo>
+                    <a:pt x="3437940" y="2621046"/>
+                  </a:lnTo>
+                  <a:lnTo>
+                    <a:pt x="3514408" y="2625310"/>
+                  </a:lnTo>
+                  <a:lnTo>
+                    <a:pt x="3590876" y="2629547"/>
+                  </a:lnTo>
+                  <a:lnTo>
+                    <a:pt x="3667345" y="2633756"/>
+                  </a:lnTo>
+                  <a:lnTo>
+                    <a:pt x="3743813" y="2637937"/>
+                  </a:lnTo>
+                  <a:lnTo>
+                    <a:pt x="3820282" y="2642091"/>
+                  </a:lnTo>
+                  <a:lnTo>
+                    <a:pt x="3896750" y="2646217"/>
+                  </a:lnTo>
+                  <a:lnTo>
+                    <a:pt x="3973219" y="2650317"/>
+                  </a:lnTo>
+                  <a:lnTo>
+                    <a:pt x="4049687" y="2654390"/>
+                  </a:lnTo>
+                  <a:lnTo>
+                    <a:pt x="4126156" y="2658436"/>
+                  </a:lnTo>
+                  <a:lnTo>
+                    <a:pt x="4202624" y="2662455"/>
+                  </a:lnTo>
+                  <a:lnTo>
+                    <a:pt x="4279092" y="2666449"/>
+                  </a:lnTo>
+                  <a:lnTo>
+                    <a:pt x="4355561" y="2670416"/>
+                  </a:lnTo>
+                  <a:lnTo>
+                    <a:pt x="4432029" y="2674357"/>
+                  </a:lnTo>
+                  <a:lnTo>
+                    <a:pt x="4508498" y="2678272"/>
+                  </a:lnTo>
+                  <a:lnTo>
+                    <a:pt x="4584966" y="2682162"/>
+                  </a:lnTo>
+                  <a:lnTo>
+                    <a:pt x="4661435" y="2686026"/>
+                  </a:lnTo>
+                  <a:lnTo>
+                    <a:pt x="4737903" y="2689864"/>
+                  </a:lnTo>
+                  <a:lnTo>
+                    <a:pt x="4814371" y="2693678"/>
+                  </a:lnTo>
+                  <a:lnTo>
+                    <a:pt x="4890840" y="2697467"/>
+                  </a:lnTo>
+                  <a:lnTo>
+                    <a:pt x="4967308" y="2701231"/>
+                  </a:lnTo>
+                  <a:lnTo>
+                    <a:pt x="5043777" y="2704970"/>
+                  </a:lnTo>
+                  <a:lnTo>
+                    <a:pt x="5120245" y="2708685"/>
+                  </a:lnTo>
+                  <a:lnTo>
+                    <a:pt x="5196714" y="2712375"/>
+                  </a:lnTo>
+                  <a:lnTo>
+                    <a:pt x="5273182" y="2716041"/>
                   </a:lnTo>
                 </a:path>
               </a:pathLst>
@@ -3763,303 +4150,303 @@
         </p:sp>
         <p:sp>
           <p:nvSpPr>
-            <p:cNvPr id="23" name="pl23"/>
+            <p:cNvPr id="32" name="pl32"/>
             <p:cNvSpPr/>
             <p:nvPr/>
           </p:nvSpPr>
           <p:spPr>
             <a:xfrm>
-              <a:off x="915645" y="4402130"/>
-              <a:ext cx="7260303" cy="1006752"/>
+              <a:off x="915645" y="4419811"/>
+              <a:ext cx="7260303" cy="1025742"/>
             </a:xfrm>
             <a:custGeom>
               <a:avLst/>
               <a:pathLst>
-                <a:path w="7260303" h="1006752">
+                <a:path w="7260303" h="1025742">
                   <a:moveTo>
-                    <a:pt x="7260303" y="1006752"/>
+                    <a:pt x="7260303" y="1025742"/>
                   </a:moveTo>
                   <a:lnTo>
-                    <a:pt x="7183835" y="1005758"/>
-                  </a:lnTo>
-                  <a:lnTo>
-                    <a:pt x="7107366" y="1004679"/>
-                  </a:lnTo>
-                  <a:lnTo>
-                    <a:pt x="7030898" y="1003509"/>
-                  </a:lnTo>
-                  <a:lnTo>
-                    <a:pt x="6954429" y="1002240"/>
-                  </a:lnTo>
-                  <a:lnTo>
-                    <a:pt x="6877961" y="1000863"/>
-                  </a:lnTo>
-                  <a:lnTo>
-                    <a:pt x="6801492" y="999369"/>
-                  </a:lnTo>
-                  <a:lnTo>
-                    <a:pt x="6725024" y="997749"/>
-                  </a:lnTo>
-                  <a:lnTo>
-                    <a:pt x="6648556" y="995991"/>
-                  </a:lnTo>
-                  <a:lnTo>
-                    <a:pt x="6572087" y="994085"/>
-                  </a:lnTo>
-                  <a:lnTo>
-                    <a:pt x="6495619" y="992016"/>
-                  </a:lnTo>
-                  <a:lnTo>
-                    <a:pt x="6419150" y="989772"/>
-                  </a:lnTo>
-                  <a:lnTo>
-                    <a:pt x="6342682" y="987338"/>
-                  </a:lnTo>
-                  <a:lnTo>
-                    <a:pt x="6266213" y="984698"/>
-                  </a:lnTo>
-                  <a:lnTo>
-                    <a:pt x="6189745" y="981834"/>
-                  </a:lnTo>
-                  <a:lnTo>
-                    <a:pt x="6113277" y="978726"/>
-                  </a:lnTo>
-                  <a:lnTo>
-                    <a:pt x="6036808" y="975356"/>
-                  </a:lnTo>
-                  <a:lnTo>
-                    <a:pt x="5960340" y="971699"/>
-                  </a:lnTo>
-                  <a:lnTo>
-                    <a:pt x="5883871" y="967733"/>
-                  </a:lnTo>
-                  <a:lnTo>
-                    <a:pt x="5807403" y="963430"/>
-                  </a:lnTo>
-                  <a:lnTo>
-                    <a:pt x="5730934" y="958762"/>
-                  </a:lnTo>
-                  <a:lnTo>
-                    <a:pt x="5654466" y="953699"/>
-                  </a:lnTo>
-                  <a:lnTo>
-                    <a:pt x="5577998" y="948206"/>
-                  </a:lnTo>
-                  <a:lnTo>
-                    <a:pt x="5501529" y="942247"/>
-                  </a:lnTo>
-                  <a:lnTo>
-                    <a:pt x="5425061" y="935783"/>
-                  </a:lnTo>
-                  <a:lnTo>
-                    <a:pt x="5348592" y="928771"/>
-                  </a:lnTo>
-                  <a:lnTo>
-                    <a:pt x="5272124" y="921165"/>
-                  </a:lnTo>
-                  <a:lnTo>
-                    <a:pt x="5195655" y="912913"/>
-                  </a:lnTo>
-                  <a:lnTo>
-                    <a:pt x="5119187" y="903962"/>
-                  </a:lnTo>
-                  <a:lnTo>
-                    <a:pt x="5042719" y="894252"/>
-                  </a:lnTo>
-                  <a:lnTo>
-                    <a:pt x="4966250" y="883718"/>
-                  </a:lnTo>
-                  <a:lnTo>
-                    <a:pt x="4889782" y="872291"/>
-                  </a:lnTo>
-                  <a:lnTo>
-                    <a:pt x="4813313" y="859896"/>
-                  </a:lnTo>
-                  <a:lnTo>
-                    <a:pt x="4736845" y="846449"/>
-                  </a:lnTo>
-                  <a:lnTo>
-                    <a:pt x="4660376" y="831862"/>
-                  </a:lnTo>
-                  <a:lnTo>
-                    <a:pt x="4583908" y="816038"/>
-                  </a:lnTo>
-                  <a:lnTo>
-                    <a:pt x="4507439" y="798873"/>
-                  </a:lnTo>
-                  <a:lnTo>
-                    <a:pt x="4430971" y="780251"/>
-                  </a:lnTo>
-                  <a:lnTo>
-                    <a:pt x="4354503" y="760051"/>
-                  </a:lnTo>
-                  <a:lnTo>
-                    <a:pt x="4278034" y="738139"/>
-                  </a:lnTo>
-                  <a:lnTo>
-                    <a:pt x="4201566" y="714368"/>
-                  </a:lnTo>
-                  <a:lnTo>
-                    <a:pt x="4125097" y="688581"/>
-                  </a:lnTo>
-                  <a:lnTo>
-                    <a:pt x="4048629" y="660608"/>
-                  </a:lnTo>
-                  <a:lnTo>
-                    <a:pt x="3972160" y="630263"/>
-                  </a:lnTo>
-                  <a:lnTo>
-                    <a:pt x="3895692" y="597345"/>
-                  </a:lnTo>
-                  <a:lnTo>
-                    <a:pt x="3819224" y="561635"/>
-                  </a:lnTo>
-                  <a:lnTo>
-                    <a:pt x="3742755" y="522898"/>
-                  </a:lnTo>
-                  <a:lnTo>
-                    <a:pt x="3666287" y="480876"/>
-                  </a:lnTo>
-                  <a:lnTo>
-                    <a:pt x="3589818" y="435291"/>
-                  </a:lnTo>
-                  <a:lnTo>
-                    <a:pt x="3513350" y="385841"/>
-                  </a:lnTo>
-                  <a:lnTo>
-                    <a:pt x="3436881" y="332197"/>
-                  </a:lnTo>
-                  <a:lnTo>
-                    <a:pt x="3360413" y="274005"/>
-                  </a:lnTo>
-                  <a:lnTo>
-                    <a:pt x="3283945" y="250466"/>
-                  </a:lnTo>
-                  <a:lnTo>
-                    <a:pt x="3207476" y="245402"/>
-                  </a:lnTo>
-                  <a:lnTo>
-                    <a:pt x="3131008" y="240304"/>
-                  </a:lnTo>
-                  <a:lnTo>
-                    <a:pt x="3054539" y="235172"/>
-                  </a:lnTo>
-                  <a:lnTo>
-                    <a:pt x="2978071" y="230007"/>
-                  </a:lnTo>
-                  <a:lnTo>
-                    <a:pt x="2901602" y="224808"/>
-                  </a:lnTo>
-                  <a:lnTo>
-                    <a:pt x="2825134" y="219574"/>
-                  </a:lnTo>
-                  <a:lnTo>
-                    <a:pt x="2748666" y="214306"/>
-                  </a:lnTo>
-                  <a:lnTo>
-                    <a:pt x="2672197" y="209003"/>
-                  </a:lnTo>
-                  <a:lnTo>
-                    <a:pt x="2595729" y="203665"/>
-                  </a:lnTo>
-                  <a:lnTo>
-                    <a:pt x="2519260" y="198292"/>
-                  </a:lnTo>
-                  <a:lnTo>
-                    <a:pt x="2442792" y="192884"/>
-                  </a:lnTo>
-                  <a:lnTo>
-                    <a:pt x="2366323" y="187440"/>
-                  </a:lnTo>
-                  <a:lnTo>
-                    <a:pt x="2289855" y="181960"/>
-                  </a:lnTo>
-                  <a:lnTo>
-                    <a:pt x="2213386" y="176444"/>
-                  </a:lnTo>
-                  <a:lnTo>
-                    <a:pt x="2136918" y="170891"/>
-                  </a:lnTo>
-                  <a:lnTo>
-                    <a:pt x="2060450" y="165302"/>
-                  </a:lnTo>
-                  <a:lnTo>
-                    <a:pt x="1983981" y="159676"/>
-                  </a:lnTo>
-                  <a:lnTo>
-                    <a:pt x="1907513" y="154013"/>
-                  </a:lnTo>
-                  <a:lnTo>
-                    <a:pt x="1831044" y="148312"/>
-                  </a:lnTo>
-                  <a:lnTo>
-                    <a:pt x="1754576" y="142574"/>
-                  </a:lnTo>
-                  <a:lnTo>
-                    <a:pt x="1678107" y="136798"/>
-                  </a:lnTo>
-                  <a:lnTo>
-                    <a:pt x="1601639" y="130984"/>
-                  </a:lnTo>
-                  <a:lnTo>
-                    <a:pt x="1525171" y="125132"/>
-                  </a:lnTo>
-                  <a:lnTo>
-                    <a:pt x="1448702" y="119241"/>
-                  </a:lnTo>
-                  <a:lnTo>
-                    <a:pt x="1372234" y="113311"/>
-                  </a:lnTo>
-                  <a:lnTo>
-                    <a:pt x="1295765" y="107343"/>
-                  </a:lnTo>
-                  <a:lnTo>
-                    <a:pt x="1219297" y="101334"/>
-                  </a:lnTo>
-                  <a:lnTo>
-                    <a:pt x="1142828" y="95287"/>
-                  </a:lnTo>
-                  <a:lnTo>
-                    <a:pt x="1066360" y="89199"/>
-                  </a:lnTo>
-                  <a:lnTo>
-                    <a:pt x="989892" y="83071"/>
-                  </a:lnTo>
-                  <a:lnTo>
-                    <a:pt x="913423" y="76903"/>
-                  </a:lnTo>
-                  <a:lnTo>
-                    <a:pt x="836955" y="70694"/>
-                  </a:lnTo>
-                  <a:lnTo>
-                    <a:pt x="760486" y="64444"/>
-                  </a:lnTo>
-                  <a:lnTo>
-                    <a:pt x="684018" y="58153"/>
-                  </a:lnTo>
-                  <a:lnTo>
-                    <a:pt x="607549" y="51820"/>
-                  </a:lnTo>
-                  <a:lnTo>
-                    <a:pt x="531081" y="45446"/>
-                  </a:lnTo>
-                  <a:lnTo>
-                    <a:pt x="454613" y="39030"/>
-                  </a:lnTo>
-                  <a:lnTo>
-                    <a:pt x="378144" y="32571"/>
-                  </a:lnTo>
-                  <a:lnTo>
-                    <a:pt x="301676" y="26070"/>
-                  </a:lnTo>
-                  <a:lnTo>
-                    <a:pt x="225207" y="19526"/>
-                  </a:lnTo>
-                  <a:lnTo>
-                    <a:pt x="148739" y="12938"/>
-                  </a:lnTo>
-                  <a:lnTo>
-                    <a:pt x="72270" y="6308"/>
+                    <a:pt x="7183835" y="1024729"/>
+                  </a:lnTo>
+                  <a:lnTo>
+                    <a:pt x="7107366" y="1023630"/>
+                  </a:lnTo>
+                  <a:lnTo>
+                    <a:pt x="7030898" y="1022438"/>
+                  </a:lnTo>
+                  <a:lnTo>
+                    <a:pt x="6954429" y="1021144"/>
+                  </a:lnTo>
+                  <a:lnTo>
+                    <a:pt x="6877961" y="1019741"/>
+                  </a:lnTo>
+                  <a:lnTo>
+                    <a:pt x="6801492" y="1018220"/>
+                  </a:lnTo>
+                  <a:lnTo>
+                    <a:pt x="6725024" y="1016569"/>
+                  </a:lnTo>
+                  <a:lnTo>
+                    <a:pt x="6648556" y="1014778"/>
+                  </a:lnTo>
+                  <a:lnTo>
+                    <a:pt x="6572087" y="1012835"/>
+                  </a:lnTo>
+                  <a:lnTo>
+                    <a:pt x="6495619" y="1010728"/>
+                  </a:lnTo>
+                  <a:lnTo>
+                    <a:pt x="6419150" y="1008442"/>
+                  </a:lnTo>
+                  <a:lnTo>
+                    <a:pt x="6342682" y="1005962"/>
+                  </a:lnTo>
+                  <a:lnTo>
+                    <a:pt x="6266213" y="1003272"/>
+                  </a:lnTo>
+                  <a:lnTo>
+                    <a:pt x="6189745" y="1000353"/>
+                  </a:lnTo>
+                  <a:lnTo>
+                    <a:pt x="6113277" y="997187"/>
+                  </a:lnTo>
+                  <a:lnTo>
+                    <a:pt x="6036808" y="993753"/>
+                  </a:lnTo>
+                  <a:lnTo>
+                    <a:pt x="5960340" y="990028"/>
+                  </a:lnTo>
+                  <a:lnTo>
+                    <a:pt x="5883871" y="985986"/>
+                  </a:lnTo>
+                  <a:lnTo>
+                    <a:pt x="5807403" y="981602"/>
+                  </a:lnTo>
+                  <a:lnTo>
+                    <a:pt x="5730934" y="976846"/>
+                  </a:lnTo>
+                  <a:lnTo>
+                    <a:pt x="5654466" y="971687"/>
+                  </a:lnTo>
+                  <a:lnTo>
+                    <a:pt x="5577998" y="966091"/>
+                  </a:lnTo>
+                  <a:lnTo>
+                    <a:pt x="5501529" y="960020"/>
+                  </a:lnTo>
+                  <a:lnTo>
+                    <a:pt x="5425061" y="953434"/>
+                  </a:lnTo>
+                  <a:lnTo>
+                    <a:pt x="5348592" y="946290"/>
+                  </a:lnTo>
+                  <a:lnTo>
+                    <a:pt x="5272124" y="938540"/>
+                  </a:lnTo>
+                  <a:lnTo>
+                    <a:pt x="5195655" y="930133"/>
+                  </a:lnTo>
+                  <a:lnTo>
+                    <a:pt x="5119187" y="921013"/>
+                  </a:lnTo>
+                  <a:lnTo>
+                    <a:pt x="5042719" y="911119"/>
+                  </a:lnTo>
+                  <a:lnTo>
+                    <a:pt x="4966250" y="900387"/>
+                  </a:lnTo>
+                  <a:lnTo>
+                    <a:pt x="4889782" y="888745"/>
+                  </a:lnTo>
+                  <a:lnTo>
+                    <a:pt x="4813313" y="876115"/>
+                  </a:lnTo>
+                  <a:lnTo>
+                    <a:pt x="4736845" y="862415"/>
+                  </a:lnTo>
+                  <a:lnTo>
+                    <a:pt x="4660376" y="847553"/>
+                  </a:lnTo>
+                  <a:lnTo>
+                    <a:pt x="4583908" y="831430"/>
+                  </a:lnTo>
+                  <a:lnTo>
+                    <a:pt x="4507439" y="813941"/>
+                  </a:lnTo>
+                  <a:lnTo>
+                    <a:pt x="4430971" y="794969"/>
+                  </a:lnTo>
+                  <a:lnTo>
+                    <a:pt x="4354503" y="774388"/>
+                  </a:lnTo>
+                  <a:lnTo>
+                    <a:pt x="4278034" y="752062"/>
+                  </a:lnTo>
+                  <a:lnTo>
+                    <a:pt x="4201566" y="727842"/>
+                  </a:lnTo>
+                  <a:lnTo>
+                    <a:pt x="4125097" y="701569"/>
+                  </a:lnTo>
+                  <a:lnTo>
+                    <a:pt x="4048629" y="673068"/>
+                  </a:lnTo>
+                  <a:lnTo>
+                    <a:pt x="3972160" y="642151"/>
+                  </a:lnTo>
+                  <a:lnTo>
+                    <a:pt x="3895692" y="608612"/>
+                  </a:lnTo>
+                  <a:lnTo>
+                    <a:pt x="3819224" y="572229"/>
+                  </a:lnTo>
+                  <a:lnTo>
+                    <a:pt x="3742755" y="532761"/>
+                  </a:lnTo>
+                  <a:lnTo>
+                    <a:pt x="3666287" y="489947"/>
+                  </a:lnTo>
+                  <a:lnTo>
+                    <a:pt x="3589818" y="443502"/>
+                  </a:lnTo>
+                  <a:lnTo>
+                    <a:pt x="3513350" y="393119"/>
+                  </a:lnTo>
+                  <a:lnTo>
+                    <a:pt x="3436881" y="338463"/>
+                  </a:lnTo>
+                  <a:lnTo>
+                    <a:pt x="3360413" y="279174"/>
+                  </a:lnTo>
+                  <a:lnTo>
+                    <a:pt x="3283945" y="255190"/>
+                  </a:lnTo>
+                  <a:lnTo>
+                    <a:pt x="3207476" y="250030"/>
+                  </a:lnTo>
+                  <a:lnTo>
+                    <a:pt x="3131008" y="244836"/>
+                  </a:lnTo>
+                  <a:lnTo>
+                    <a:pt x="3054539" y="239608"/>
+                  </a:lnTo>
+                  <a:lnTo>
+                    <a:pt x="2978071" y="234346"/>
+                  </a:lnTo>
+                  <a:lnTo>
+                    <a:pt x="2901602" y="229048"/>
+                  </a:lnTo>
+                  <a:lnTo>
+                    <a:pt x="2825134" y="223716"/>
+                  </a:lnTo>
+                  <a:lnTo>
+                    <a:pt x="2748666" y="218348"/>
+                  </a:lnTo>
+                  <a:lnTo>
+                    <a:pt x="2672197" y="212945"/>
+                  </a:lnTo>
+                  <a:lnTo>
+                    <a:pt x="2595729" y="207507"/>
+                  </a:lnTo>
+                  <a:lnTo>
+                    <a:pt x="2519260" y="202033"/>
+                  </a:lnTo>
+                  <a:lnTo>
+                    <a:pt x="2442792" y="196522"/>
+                  </a:lnTo>
+                  <a:lnTo>
+                    <a:pt x="2366323" y="190975"/>
+                  </a:lnTo>
+                  <a:lnTo>
+                    <a:pt x="2289855" y="185392"/>
+                  </a:lnTo>
+                  <a:lnTo>
+                    <a:pt x="2213386" y="179772"/>
+                  </a:lnTo>
+                  <a:lnTo>
+                    <a:pt x="2136918" y="174114"/>
+                  </a:lnTo>
+                  <a:lnTo>
+                    <a:pt x="2060450" y="168420"/>
+                  </a:lnTo>
+                  <a:lnTo>
+                    <a:pt x="1983981" y="162688"/>
+                  </a:lnTo>
+                  <a:lnTo>
+                    <a:pt x="1907513" y="156918"/>
+                  </a:lnTo>
+                  <a:lnTo>
+                    <a:pt x="1831044" y="151110"/>
+                  </a:lnTo>
+                  <a:lnTo>
+                    <a:pt x="1754576" y="145264"/>
+                  </a:lnTo>
+                  <a:lnTo>
+                    <a:pt x="1678107" y="139379"/>
+                  </a:lnTo>
+                  <a:lnTo>
+                    <a:pt x="1601639" y="133455"/>
+                  </a:lnTo>
+                  <a:lnTo>
+                    <a:pt x="1525171" y="127492"/>
+                  </a:lnTo>
+                  <a:lnTo>
+                    <a:pt x="1448702" y="121490"/>
+                  </a:lnTo>
+                  <a:lnTo>
+                    <a:pt x="1372234" y="115449"/>
+                  </a:lnTo>
+                  <a:lnTo>
+                    <a:pt x="1295765" y="109367"/>
+                  </a:lnTo>
+                  <a:lnTo>
+                    <a:pt x="1219297" y="103246"/>
+                  </a:lnTo>
+                  <a:lnTo>
+                    <a:pt x="1142828" y="97084"/>
+                  </a:lnTo>
+                  <a:lnTo>
+                    <a:pt x="1066360" y="90881"/>
+                  </a:lnTo>
+                  <a:lnTo>
+                    <a:pt x="989892" y="84638"/>
+                  </a:lnTo>
+                  <a:lnTo>
+                    <a:pt x="913423" y="78353"/>
+                  </a:lnTo>
+                  <a:lnTo>
+                    <a:pt x="836955" y="72027"/>
+                  </a:lnTo>
+                  <a:lnTo>
+                    <a:pt x="760486" y="65660"/>
+                  </a:lnTo>
+                  <a:lnTo>
+                    <a:pt x="684018" y="59250"/>
+                  </a:lnTo>
+                  <a:lnTo>
+                    <a:pt x="607549" y="52798"/>
+                  </a:lnTo>
+                  <a:lnTo>
+                    <a:pt x="531081" y="46303"/>
+                  </a:lnTo>
+                  <a:lnTo>
+                    <a:pt x="454613" y="39766"/>
+                  </a:lnTo>
+                  <a:lnTo>
+                    <a:pt x="378144" y="33185"/>
+                  </a:lnTo>
+                  <a:lnTo>
+                    <a:pt x="301676" y="26561"/>
+                  </a:lnTo>
+                  <a:lnTo>
+                    <a:pt x="225207" y="19894"/>
+                  </a:lnTo>
+                  <a:lnTo>
+                    <a:pt x="148739" y="13182"/>
+                  </a:lnTo>
+                  <a:lnTo>
+                    <a:pt x="72270" y="6427"/>
                   </a:lnTo>
                   <a:lnTo>
                     <a:pt x="0" y="0"/>
@@ -4076,273 +4463,273 @@
         </p:sp>
         <p:sp>
           <p:nvSpPr>
-            <p:cNvPr id="24" name="pl24"/>
+            <p:cNvPr id="33" name="pl33"/>
             <p:cNvSpPr/>
             <p:nvPr/>
           </p:nvSpPr>
           <p:spPr>
             <a:xfrm>
-              <a:off x="1755894" y="2209169"/>
-              <a:ext cx="6420054" cy="3131448"/>
+              <a:off x="1755894" y="2185486"/>
+              <a:ext cx="6420054" cy="3190514"/>
             </a:xfrm>
             <a:custGeom>
               <a:avLst/>
               <a:pathLst>
-                <a:path w="6420054" h="3131448">
+                <a:path w="6420054" h="3190514">
                   <a:moveTo>
                     <a:pt x="0" y="0"/>
                   </a:moveTo>
                   <a:lnTo>
-                    <a:pt x="73174" y="132475"/>
-                  </a:lnTo>
-                  <a:lnTo>
-                    <a:pt x="149643" y="264956"/>
-                  </a:lnTo>
-                  <a:lnTo>
-                    <a:pt x="226111" y="391737"/>
-                  </a:lnTo>
-                  <a:lnTo>
-                    <a:pt x="302579" y="513063"/>
-                  </a:lnTo>
-                  <a:lnTo>
-                    <a:pt x="379048" y="629169"/>
-                  </a:lnTo>
-                  <a:lnTo>
-                    <a:pt x="455516" y="740278"/>
-                  </a:lnTo>
-                  <a:lnTo>
-                    <a:pt x="531985" y="846607"/>
-                  </a:lnTo>
-                  <a:lnTo>
-                    <a:pt x="608453" y="948361"/>
-                  </a:lnTo>
-                  <a:lnTo>
-                    <a:pt x="684922" y="1045737"/>
-                  </a:lnTo>
-                  <a:lnTo>
-                    <a:pt x="761390" y="1138922"/>
-                  </a:lnTo>
-                  <a:lnTo>
-                    <a:pt x="837858" y="1228098"/>
-                  </a:lnTo>
-                  <a:lnTo>
-                    <a:pt x="914327" y="1313437"/>
-                  </a:lnTo>
-                  <a:lnTo>
-                    <a:pt x="990795" y="1395104"/>
-                  </a:lnTo>
-                  <a:lnTo>
-                    <a:pt x="1067264" y="1473258"/>
-                  </a:lnTo>
-                  <a:lnTo>
-                    <a:pt x="1143732" y="1548048"/>
-                  </a:lnTo>
-                  <a:lnTo>
-                    <a:pt x="1220201" y="1619620"/>
-                  </a:lnTo>
-                  <a:lnTo>
-                    <a:pt x="1296669" y="1688113"/>
-                  </a:lnTo>
-                  <a:lnTo>
-                    <a:pt x="1373138" y="1753658"/>
-                  </a:lnTo>
-                  <a:lnTo>
-                    <a:pt x="1449606" y="1816384"/>
-                  </a:lnTo>
-                  <a:lnTo>
-                    <a:pt x="1526074" y="1876410"/>
-                  </a:lnTo>
-                  <a:lnTo>
-                    <a:pt x="1602543" y="1933854"/>
-                  </a:lnTo>
-                  <a:lnTo>
-                    <a:pt x="1679011" y="1988825"/>
-                  </a:lnTo>
-                  <a:lnTo>
-                    <a:pt x="1755480" y="2041432"/>
-                  </a:lnTo>
-                  <a:lnTo>
-                    <a:pt x="1831948" y="2091775"/>
-                  </a:lnTo>
-                  <a:lnTo>
-                    <a:pt x="1908417" y="2139952"/>
-                  </a:lnTo>
-                  <a:lnTo>
-                    <a:pt x="1984885" y="2186056"/>
-                  </a:lnTo>
-                  <a:lnTo>
-                    <a:pt x="2061353" y="2230176"/>
-                  </a:lnTo>
-                  <a:lnTo>
-                    <a:pt x="2137822" y="2272397"/>
-                  </a:lnTo>
-                  <a:lnTo>
-                    <a:pt x="2214290" y="2312802"/>
-                  </a:lnTo>
-                  <a:lnTo>
-                    <a:pt x="2290759" y="2351469"/>
-                  </a:lnTo>
-                  <a:lnTo>
-                    <a:pt x="2367227" y="2388472"/>
-                  </a:lnTo>
-                  <a:lnTo>
-                    <a:pt x="2443696" y="2423882"/>
-                  </a:lnTo>
-                  <a:lnTo>
-                    <a:pt x="2520164" y="2457769"/>
-                  </a:lnTo>
-                  <a:lnTo>
-                    <a:pt x="2596632" y="2490198"/>
-                  </a:lnTo>
-                  <a:lnTo>
-                    <a:pt x="2673101" y="2521232"/>
-                  </a:lnTo>
-                  <a:lnTo>
-                    <a:pt x="2749569" y="2550930"/>
-                  </a:lnTo>
-                  <a:lnTo>
-                    <a:pt x="2826038" y="2579350"/>
-                  </a:lnTo>
-                  <a:lnTo>
-                    <a:pt x="2902506" y="2606548"/>
-                  </a:lnTo>
-                  <a:lnTo>
-                    <a:pt x="2978975" y="2632575"/>
-                  </a:lnTo>
-                  <a:lnTo>
-                    <a:pt x="3055443" y="2657482"/>
-                  </a:lnTo>
-                  <a:lnTo>
-                    <a:pt x="3131911" y="2681318"/>
-                  </a:lnTo>
-                  <a:lnTo>
-                    <a:pt x="3208380" y="2704128"/>
-                  </a:lnTo>
-                  <a:lnTo>
-                    <a:pt x="3284848" y="2725956"/>
-                  </a:lnTo>
-                  <a:lnTo>
-                    <a:pt x="3361317" y="2746846"/>
-                  </a:lnTo>
-                  <a:lnTo>
-                    <a:pt x="3437785" y="2766836"/>
-                  </a:lnTo>
-                  <a:lnTo>
-                    <a:pt x="3514254" y="2785966"/>
-                  </a:lnTo>
-                  <a:lnTo>
-                    <a:pt x="3590722" y="2804274"/>
-                  </a:lnTo>
-                  <a:lnTo>
-                    <a:pt x="3667190" y="2821793"/>
-                  </a:lnTo>
-                  <a:lnTo>
-                    <a:pt x="3743659" y="2838559"/>
-                  </a:lnTo>
-                  <a:lnTo>
-                    <a:pt x="3820127" y="2854603"/>
-                  </a:lnTo>
-                  <a:lnTo>
-                    <a:pt x="3896596" y="2869957"/>
-                  </a:lnTo>
-                  <a:lnTo>
-                    <a:pt x="3973064" y="2884650"/>
-                  </a:lnTo>
-                  <a:lnTo>
-                    <a:pt x="4049533" y="2898711"/>
-                  </a:lnTo>
-                  <a:lnTo>
-                    <a:pt x="4126001" y="2912167"/>
-                  </a:lnTo>
-                  <a:lnTo>
-                    <a:pt x="4202470" y="2925044"/>
-                  </a:lnTo>
-                  <a:lnTo>
-                    <a:pt x="4278938" y="2937367"/>
-                  </a:lnTo>
-                  <a:lnTo>
-                    <a:pt x="4355406" y="2949160"/>
-                  </a:lnTo>
-                  <a:lnTo>
-                    <a:pt x="4431875" y="2960445"/>
-                  </a:lnTo>
-                  <a:lnTo>
-                    <a:pt x="4508343" y="2971245"/>
-                  </a:lnTo>
-                  <a:lnTo>
-                    <a:pt x="4584812" y="2981580"/>
-                  </a:lnTo>
-                  <a:lnTo>
-                    <a:pt x="4661280" y="2991471"/>
-                  </a:lnTo>
-                  <a:lnTo>
-                    <a:pt x="4737749" y="3000935"/>
-                  </a:lnTo>
-                  <a:lnTo>
-                    <a:pt x="4814217" y="3009993"/>
-                  </a:lnTo>
-                  <a:lnTo>
-                    <a:pt x="4890685" y="3018661"/>
-                  </a:lnTo>
-                  <a:lnTo>
-                    <a:pt x="4967154" y="3026956"/>
-                  </a:lnTo>
-                  <a:lnTo>
-                    <a:pt x="5043622" y="3034894"/>
-                  </a:lnTo>
-                  <a:lnTo>
-                    <a:pt x="5120091" y="3042490"/>
-                  </a:lnTo>
-                  <a:lnTo>
-                    <a:pt x="5196559" y="3049759"/>
-                  </a:lnTo>
-                  <a:lnTo>
-                    <a:pt x="5273028" y="3056716"/>
-                  </a:lnTo>
-                  <a:lnTo>
-                    <a:pt x="5349496" y="3063374"/>
-                  </a:lnTo>
-                  <a:lnTo>
-                    <a:pt x="5425964" y="3069745"/>
-                  </a:lnTo>
-                  <a:lnTo>
-                    <a:pt x="5502433" y="3075841"/>
-                  </a:lnTo>
-                  <a:lnTo>
-                    <a:pt x="5578901" y="3081676"/>
-                  </a:lnTo>
-                  <a:lnTo>
-                    <a:pt x="5655370" y="3087259"/>
-                  </a:lnTo>
-                  <a:lnTo>
-                    <a:pt x="5731838" y="3092603"/>
-                  </a:lnTo>
-                  <a:lnTo>
-                    <a:pt x="5808307" y="3097716"/>
-                  </a:lnTo>
-                  <a:lnTo>
-                    <a:pt x="5884775" y="3102609"/>
-                  </a:lnTo>
-                  <a:lnTo>
-                    <a:pt x="5961243" y="3107292"/>
-                  </a:lnTo>
-                  <a:lnTo>
-                    <a:pt x="6037712" y="3111773"/>
-                  </a:lnTo>
-                  <a:lnTo>
-                    <a:pt x="6114180" y="3116062"/>
-                  </a:lnTo>
-                  <a:lnTo>
-                    <a:pt x="6190649" y="3120165"/>
-                  </a:lnTo>
-                  <a:lnTo>
-                    <a:pt x="6267117" y="3124093"/>
-                  </a:lnTo>
-                  <a:lnTo>
-                    <a:pt x="6343586" y="3127851"/>
-                  </a:lnTo>
-                  <a:lnTo>
-                    <a:pt x="6420054" y="3131448"/>
+                    <a:pt x="73174" y="134973"/>
+                  </a:lnTo>
+                  <a:lnTo>
+                    <a:pt x="149643" y="269954"/>
+                  </a:lnTo>
+                  <a:lnTo>
+                    <a:pt x="226111" y="399126"/>
+                  </a:lnTo>
+                  <a:lnTo>
+                    <a:pt x="302579" y="522741"/>
+                  </a:lnTo>
+                  <a:lnTo>
+                    <a:pt x="379048" y="641036"/>
+                  </a:lnTo>
+                  <a:lnTo>
+                    <a:pt x="455516" y="754242"/>
+                  </a:lnTo>
+                  <a:lnTo>
+                    <a:pt x="531985" y="862576"/>
+                  </a:lnTo>
+                  <a:lnTo>
+                    <a:pt x="608453" y="966249"/>
+                  </a:lnTo>
+                  <a:lnTo>
+                    <a:pt x="684922" y="1065461"/>
+                  </a:lnTo>
+                  <a:lnTo>
+                    <a:pt x="761390" y="1160405"/>
+                  </a:lnTo>
+                  <a:lnTo>
+                    <a:pt x="837858" y="1251263"/>
+                  </a:lnTo>
+                  <a:lnTo>
+                    <a:pt x="914327" y="1338212"/>
+                  </a:lnTo>
+                  <a:lnTo>
+                    <a:pt x="990795" y="1421419"/>
+                  </a:lnTo>
+                  <a:lnTo>
+                    <a:pt x="1067264" y="1501046"/>
+                  </a:lnTo>
+                  <a:lnTo>
+                    <a:pt x="1143732" y="1577247"/>
+                  </a:lnTo>
+                  <a:lnTo>
+                    <a:pt x="1220201" y="1650170"/>
+                  </a:lnTo>
+                  <a:lnTo>
+                    <a:pt x="1296669" y="1719954"/>
+                  </a:lnTo>
+                  <a:lnTo>
+                    <a:pt x="1373138" y="1786736"/>
+                  </a:lnTo>
+                  <a:lnTo>
+                    <a:pt x="1449606" y="1850645"/>
+                  </a:lnTo>
+                  <a:lnTo>
+                    <a:pt x="1526074" y="1911803"/>
+                  </a:lnTo>
+                  <a:lnTo>
+                    <a:pt x="1602543" y="1970330"/>
+                  </a:lnTo>
+                  <a:lnTo>
+                    <a:pt x="1679011" y="2026339"/>
+                  </a:lnTo>
+                  <a:lnTo>
+                    <a:pt x="1755480" y="2079938"/>
+                  </a:lnTo>
+                  <a:lnTo>
+                    <a:pt x="1831948" y="2131230"/>
+                  </a:lnTo>
+                  <a:lnTo>
+                    <a:pt x="1908417" y="2180316"/>
+                  </a:lnTo>
+                  <a:lnTo>
+                    <a:pt x="1984885" y="2227289"/>
+                  </a:lnTo>
+                  <a:lnTo>
+                    <a:pt x="2061353" y="2272242"/>
+                  </a:lnTo>
+                  <a:lnTo>
+                    <a:pt x="2137822" y="2315260"/>
+                  </a:lnTo>
+                  <a:lnTo>
+                    <a:pt x="2214290" y="2356427"/>
+                  </a:lnTo>
+                  <a:lnTo>
+                    <a:pt x="2290759" y="2395823"/>
+                  </a:lnTo>
+                  <a:lnTo>
+                    <a:pt x="2367227" y="2433524"/>
+                  </a:lnTo>
+                  <a:lnTo>
+                    <a:pt x="2443696" y="2469602"/>
+                  </a:lnTo>
+                  <a:lnTo>
+                    <a:pt x="2520164" y="2504128"/>
+                  </a:lnTo>
+                  <a:lnTo>
+                    <a:pt x="2596632" y="2537169"/>
+                  </a:lnTo>
+                  <a:lnTo>
+                    <a:pt x="2673101" y="2568788"/>
+                  </a:lnTo>
+                  <a:lnTo>
+                    <a:pt x="2749569" y="2599046"/>
+                  </a:lnTo>
+                  <a:lnTo>
+                    <a:pt x="2826038" y="2628002"/>
+                  </a:lnTo>
+                  <a:lnTo>
+                    <a:pt x="2902506" y="2655713"/>
+                  </a:lnTo>
+                  <a:lnTo>
+                    <a:pt x="2978975" y="2682231"/>
+                  </a:lnTo>
+                  <a:lnTo>
+                    <a:pt x="3055443" y="2707608"/>
+                  </a:lnTo>
+                  <a:lnTo>
+                    <a:pt x="3131911" y="2731893"/>
+                  </a:lnTo>
+                  <a:lnTo>
+                    <a:pt x="3208380" y="2755134"/>
+                  </a:lnTo>
+                  <a:lnTo>
+                    <a:pt x="3284848" y="2777374"/>
+                  </a:lnTo>
+                  <a:lnTo>
+                    <a:pt x="3361317" y="2798657"/>
+                  </a:lnTo>
+                  <a:lnTo>
+                    <a:pt x="3437785" y="2819025"/>
+                  </a:lnTo>
+                  <a:lnTo>
+                    <a:pt x="3514254" y="2838516"/>
+                  </a:lnTo>
+                  <a:lnTo>
+                    <a:pt x="3590722" y="2857169"/>
+                  </a:lnTo>
+                  <a:lnTo>
+                    <a:pt x="3667190" y="2875018"/>
+                  </a:lnTo>
+                  <a:lnTo>
+                    <a:pt x="3743659" y="2892100"/>
+                  </a:lnTo>
+                  <a:lnTo>
+                    <a:pt x="3820127" y="2908447"/>
+                  </a:lnTo>
+                  <a:lnTo>
+                    <a:pt x="3896596" y="2924091"/>
+                  </a:lnTo>
+                  <a:lnTo>
+                    <a:pt x="3973064" y="2939061"/>
+                  </a:lnTo>
+                  <a:lnTo>
+                    <a:pt x="4049533" y="2953387"/>
+                  </a:lnTo>
+                  <a:lnTo>
+                    <a:pt x="4126001" y="2967097"/>
+                  </a:lnTo>
+                  <a:lnTo>
+                    <a:pt x="4202470" y="2980217"/>
+                  </a:lnTo>
+                  <a:lnTo>
+                    <a:pt x="4278938" y="2992773"/>
+                  </a:lnTo>
+                  <a:lnTo>
+                    <a:pt x="4355406" y="3004788"/>
+                  </a:lnTo>
+                  <a:lnTo>
+                    <a:pt x="4431875" y="3016286"/>
+                  </a:lnTo>
+                  <a:lnTo>
+                    <a:pt x="4508343" y="3027289"/>
+                  </a:lnTo>
+                  <a:lnTo>
+                    <a:pt x="4584812" y="3037819"/>
+                  </a:lnTo>
+                  <a:lnTo>
+                    <a:pt x="4661280" y="3047896"/>
+                  </a:lnTo>
+                  <a:lnTo>
+                    <a:pt x="4737749" y="3057540"/>
+                  </a:lnTo>
+                  <a:lnTo>
+                    <a:pt x="4814217" y="3066768"/>
+                  </a:lnTo>
+                  <a:lnTo>
+                    <a:pt x="4890685" y="3075599"/>
+                  </a:lnTo>
+                  <a:lnTo>
+                    <a:pt x="4967154" y="3084051"/>
+                  </a:lnTo>
+                  <a:lnTo>
+                    <a:pt x="5043622" y="3092138"/>
+                  </a:lnTo>
+                  <a:lnTo>
+                    <a:pt x="5120091" y="3099878"/>
+                  </a:lnTo>
+                  <a:lnTo>
+                    <a:pt x="5196559" y="3107285"/>
+                  </a:lnTo>
+                  <a:lnTo>
+                    <a:pt x="5273028" y="3114373"/>
+                  </a:lnTo>
+                  <a:lnTo>
+                    <a:pt x="5349496" y="3121156"/>
+                  </a:lnTo>
+                  <a:lnTo>
+                    <a:pt x="5425964" y="3127647"/>
+                  </a:lnTo>
+                  <a:lnTo>
+                    <a:pt x="5502433" y="3133859"/>
+                  </a:lnTo>
+                  <a:lnTo>
+                    <a:pt x="5578901" y="3139803"/>
+                  </a:lnTo>
+                  <a:lnTo>
+                    <a:pt x="5655370" y="3145492"/>
+                  </a:lnTo>
+                  <a:lnTo>
+                    <a:pt x="5731838" y="3150936"/>
+                  </a:lnTo>
+                  <a:lnTo>
+                    <a:pt x="5808307" y="3156146"/>
+                  </a:lnTo>
+                  <a:lnTo>
+                    <a:pt x="5884775" y="3161131"/>
+                  </a:lnTo>
+                  <a:lnTo>
+                    <a:pt x="5961243" y="3165902"/>
+                  </a:lnTo>
+                  <a:lnTo>
+                    <a:pt x="6037712" y="3170468"/>
+                  </a:lnTo>
+                  <a:lnTo>
+                    <a:pt x="6114180" y="3174837"/>
+                  </a:lnTo>
+                  <a:lnTo>
+                    <a:pt x="6190649" y="3179019"/>
+                  </a:lnTo>
+                  <a:lnTo>
+                    <a:pt x="6267117" y="3183020"/>
+                  </a:lnTo>
+                  <a:lnTo>
+                    <a:pt x="6343586" y="3186849"/>
+                  </a:lnTo>
+                  <a:lnTo>
+                    <a:pt x="6420054" y="3190514"/>
                   </a:lnTo>
                 </a:path>
               </a:pathLst>
@@ -4365,13 +4752,13 @@
         </p:sp>
         <p:sp>
           <p:nvSpPr>
-            <p:cNvPr id="25" name="pl25"/>
+            <p:cNvPr id="34" name="pl34"/>
             <p:cNvSpPr/>
             <p:nvPr/>
           </p:nvSpPr>
           <p:spPr>
             <a:xfrm>
-              <a:off x="915645" y="4655980"/>
+              <a:off x="915645" y="4678449"/>
               <a:ext cx="7682587" cy="0"/>
             </a:xfrm>
             <a:custGeom>
@@ -4408,21 +4795,21 @@
         </p:sp>
         <p:sp>
           <p:nvSpPr>
-            <p:cNvPr id="26" name="pl26"/>
+            <p:cNvPr id="35" name="pl35"/>
             <p:cNvSpPr/>
             <p:nvPr/>
           </p:nvSpPr>
           <p:spPr>
             <a:xfrm>
-              <a:off x="4250960" y="2209169"/>
-              <a:ext cx="0" cy="3364365"/>
+              <a:off x="4250960" y="2185486"/>
+              <a:ext cx="0" cy="3427824"/>
             </a:xfrm>
             <a:custGeom>
               <a:avLst/>
               <a:pathLst>
-                <a:path w="0" h="3364365">
+                <a:path w="0" h="3427824">
                   <a:moveTo>
-                    <a:pt x="0" y="3364365"/>
+                    <a:pt x="0" y="3427824"/>
                   </a:moveTo>
                   <a:lnTo>
                     <a:pt x="0" y="0"/>
@@ -4451,13 +4838,13 @@
         </p:sp>
         <p:sp>
           <p:nvSpPr>
-            <p:cNvPr id="27" name="tx27"/>
+            <p:cNvPr id="36" name="tx36"/>
             <p:cNvSpPr/>
             <p:nvPr/>
           </p:nvSpPr>
           <p:spPr>
             <a:xfrm>
-              <a:off x="756929" y="5369631"/>
+              <a:off x="756929" y="5406523"/>
               <a:ext cx="79004" cy="101955"/>
             </a:xfrm>
             <a:prstGeom prst="rect">
@@ -4497,13 +4884,13 @@
         </p:sp>
         <p:sp>
           <p:nvSpPr>
-            <p:cNvPr id="28" name="tx28"/>
+            <p:cNvPr id="37" name="tx37"/>
             <p:cNvSpPr/>
             <p:nvPr/>
           </p:nvSpPr>
           <p:spPr>
             <a:xfrm>
-              <a:off x="756929" y="4605002"/>
+              <a:off x="756929" y="4627472"/>
               <a:ext cx="79004" cy="101955"/>
             </a:xfrm>
             <a:prstGeom prst="rect">
@@ -4543,13 +4930,13 @@
         </p:sp>
         <p:sp>
           <p:nvSpPr>
-            <p:cNvPr id="29" name="tx29"/>
+            <p:cNvPr id="38" name="tx38"/>
             <p:cNvSpPr/>
             <p:nvPr/>
           </p:nvSpPr>
           <p:spPr>
             <a:xfrm>
-              <a:off x="756929" y="3840374"/>
+              <a:off x="756929" y="3848420"/>
               <a:ext cx="79004" cy="101955"/>
             </a:xfrm>
             <a:prstGeom prst="rect">
@@ -4589,13 +4976,13 @@
         </p:sp>
         <p:sp>
           <p:nvSpPr>
-            <p:cNvPr id="30" name="tx30"/>
+            <p:cNvPr id="39" name="tx39"/>
             <p:cNvSpPr/>
             <p:nvPr/>
           </p:nvSpPr>
           <p:spPr>
             <a:xfrm>
-              <a:off x="756929" y="3075745"/>
+              <a:off x="756929" y="3069369"/>
               <a:ext cx="79004" cy="101955"/>
             </a:xfrm>
             <a:prstGeom prst="rect">
@@ -4635,13 +5022,13 @@
         </p:sp>
         <p:sp>
           <p:nvSpPr>
-            <p:cNvPr id="31" name="tx31"/>
+            <p:cNvPr id="40" name="tx40"/>
             <p:cNvSpPr/>
             <p:nvPr/>
           </p:nvSpPr>
           <p:spPr>
             <a:xfrm>
-              <a:off x="756929" y="2311117"/>
+              <a:off x="756929" y="2290318"/>
               <a:ext cx="79004" cy="101955"/>
             </a:xfrm>
             <a:prstGeom prst="rect">
@@ -4681,14 +5068,14 @@
         </p:sp>
         <p:sp>
           <p:nvSpPr>
-            <p:cNvPr id="32" name="tx32"/>
+            <p:cNvPr id="41" name="tx41"/>
             <p:cNvSpPr/>
             <p:nvPr/>
           </p:nvSpPr>
           <p:spPr>
             <a:xfrm>
-              <a:off x="2451993" y="5653245"/>
-              <a:ext cx="244784" cy="101955"/>
+              <a:off x="1598722" y="5693022"/>
+              <a:ext cx="205282" cy="101955"/>
             </a:xfrm>
             <a:prstGeom prst="rect">
               <a:avLst/>
@@ -4720,21 +5107,21 @@
                   <a:latin typeface="Helvetica"/>
                   <a:cs typeface="Helvetica"/>
                 </a:rPr>
-                <a:t>-0.2</a:t>
+                <a:t>-30</a:t>
               </a:r>
             </a:p>
           </p:txBody>
         </p:sp>
         <p:sp>
           <p:nvSpPr>
-            <p:cNvPr id="33" name="tx33"/>
+            <p:cNvPr id="42" name="tx42"/>
             <p:cNvSpPr/>
             <p:nvPr/>
           </p:nvSpPr>
           <p:spPr>
             <a:xfrm>
-              <a:off x="4221672" y="5653245"/>
-              <a:ext cx="197510" cy="101955"/>
+              <a:off x="2471744" y="5693022"/>
+              <a:ext cx="205282" cy="101955"/>
             </a:xfrm>
             <a:prstGeom prst="rect">
               <a:avLst/>
@@ -4766,21 +5153,21 @@
                   <a:latin typeface="Helvetica"/>
                   <a:cs typeface="Helvetica"/>
                 </a:rPr>
-                <a:t>0.0</a:t>
+                <a:t>-20</a:t>
               </a:r>
             </a:p>
           </p:txBody>
         </p:sp>
         <p:sp>
           <p:nvSpPr>
-            <p:cNvPr id="34" name="tx34"/>
+            <p:cNvPr id="43" name="tx43"/>
             <p:cNvSpPr/>
             <p:nvPr/>
           </p:nvSpPr>
           <p:spPr>
             <a:xfrm>
-              <a:off x="5967715" y="5653245"/>
-              <a:ext cx="197510" cy="101955"/>
+              <a:off x="3344765" y="5693022"/>
+              <a:ext cx="205282" cy="101955"/>
             </a:xfrm>
             <a:prstGeom prst="rect">
               <a:avLst/>
@@ -4812,21 +5199,21 @@
                   <a:latin typeface="Helvetica"/>
                   <a:cs typeface="Helvetica"/>
                 </a:rPr>
-                <a:t>0.2</a:t>
+                <a:t>-10</a:t>
               </a:r>
             </a:p>
           </p:txBody>
         </p:sp>
         <p:sp>
           <p:nvSpPr>
-            <p:cNvPr id="35" name="tx35"/>
+            <p:cNvPr id="44" name="tx44"/>
             <p:cNvSpPr/>
             <p:nvPr/>
           </p:nvSpPr>
           <p:spPr>
             <a:xfrm>
-              <a:off x="7713757" y="5653245"/>
-              <a:ext cx="197510" cy="101955"/>
+              <a:off x="4280925" y="5693022"/>
+              <a:ext cx="79004" cy="101955"/>
             </a:xfrm>
             <a:prstGeom prst="rect">
               <a:avLst/>
@@ -4858,21 +5245,205 @@
                   <a:latin typeface="Helvetica"/>
                   <a:cs typeface="Helvetica"/>
                 </a:rPr>
-                <a:t>0.4</a:t>
+                <a:t>0</a:t>
               </a:r>
             </a:p>
           </p:txBody>
         </p:sp>
         <p:sp>
           <p:nvSpPr>
-            <p:cNvPr id="36" name="tx36"/>
+            <p:cNvPr id="45" name="tx45"/>
             <p:cNvSpPr/>
             <p:nvPr/>
           </p:nvSpPr>
           <p:spPr>
             <a:xfrm>
-              <a:off x="2688337" y="5834415"/>
-              <a:ext cx="2138873" cy="127558"/>
+              <a:off x="5114445" y="5693022"/>
+              <a:ext cx="158008" cy="101955"/>
+            </a:xfrm>
+            <a:prstGeom prst="rect">
+              <a:avLst/>
+            </a:prstGeom>
+            <a:noFill/>
+          </p:spPr>
+          <p:txBody>
+            <a:bodyPr lIns="0" rIns="0" tIns="0" bIns="0" anchorCtr="1" anchor="ctr" wrap="none"/>
+            <a:lstStyle/>
+            <a:p>
+              <a:pPr algn="l" marL="0" marR="0" indent="0">
+                <a:lnSpc>
+                  <a:spcPts val="1120"/>
+                </a:lnSpc>
+                <a:spcBef>
+                  <a:spcPts val="0"/>
+                </a:spcBef>
+                <a:spcAft>
+                  <a:spcPts val="0"/>
+                </a:spcAft>
+              </a:pPr>
+              <a:r>
+                <a:rPr sz="1120">
+                  <a:solidFill>
+                    <a:srgbClr val="4D4D4D">
+                      <a:alpha val="100000"/>
+                    </a:srgbClr>
+                  </a:solidFill>
+                  <a:latin typeface="Helvetica"/>
+                  <a:cs typeface="Helvetica"/>
+                </a:rPr>
+                <a:t>10</a:t>
+              </a:r>
+            </a:p>
+          </p:txBody>
+        </p:sp>
+        <p:sp>
+          <p:nvSpPr>
+            <p:cNvPr id="46" name="tx46"/>
+            <p:cNvSpPr/>
+            <p:nvPr/>
+          </p:nvSpPr>
+          <p:spPr>
+            <a:xfrm>
+              <a:off x="5987466" y="5693022"/>
+              <a:ext cx="158008" cy="101955"/>
+            </a:xfrm>
+            <a:prstGeom prst="rect">
+              <a:avLst/>
+            </a:prstGeom>
+            <a:noFill/>
+          </p:spPr>
+          <p:txBody>
+            <a:bodyPr lIns="0" rIns="0" tIns="0" bIns="0" anchorCtr="1" anchor="ctr" wrap="none"/>
+            <a:lstStyle/>
+            <a:p>
+              <a:pPr algn="l" marL="0" marR="0" indent="0">
+                <a:lnSpc>
+                  <a:spcPts val="1120"/>
+                </a:lnSpc>
+                <a:spcBef>
+                  <a:spcPts val="0"/>
+                </a:spcBef>
+                <a:spcAft>
+                  <a:spcPts val="0"/>
+                </a:spcAft>
+              </a:pPr>
+              <a:r>
+                <a:rPr sz="1120">
+                  <a:solidFill>
+                    <a:srgbClr val="4D4D4D">
+                      <a:alpha val="100000"/>
+                    </a:srgbClr>
+                  </a:solidFill>
+                  <a:latin typeface="Helvetica"/>
+                  <a:cs typeface="Helvetica"/>
+                </a:rPr>
+                <a:t>20</a:t>
+              </a:r>
+            </a:p>
+          </p:txBody>
+        </p:sp>
+        <p:sp>
+          <p:nvSpPr>
+            <p:cNvPr id="47" name="tx47"/>
+            <p:cNvSpPr/>
+            <p:nvPr/>
+          </p:nvSpPr>
+          <p:spPr>
+            <a:xfrm>
+              <a:off x="6860487" y="5693022"/>
+              <a:ext cx="158008" cy="101955"/>
+            </a:xfrm>
+            <a:prstGeom prst="rect">
+              <a:avLst/>
+            </a:prstGeom>
+            <a:noFill/>
+          </p:spPr>
+          <p:txBody>
+            <a:bodyPr lIns="0" rIns="0" tIns="0" bIns="0" anchorCtr="1" anchor="ctr" wrap="none"/>
+            <a:lstStyle/>
+            <a:p>
+              <a:pPr algn="l" marL="0" marR="0" indent="0">
+                <a:lnSpc>
+                  <a:spcPts val="1120"/>
+                </a:lnSpc>
+                <a:spcBef>
+                  <a:spcPts val="0"/>
+                </a:spcBef>
+                <a:spcAft>
+                  <a:spcPts val="0"/>
+                </a:spcAft>
+              </a:pPr>
+              <a:r>
+                <a:rPr sz="1120">
+                  <a:solidFill>
+                    <a:srgbClr val="4D4D4D">
+                      <a:alpha val="100000"/>
+                    </a:srgbClr>
+                  </a:solidFill>
+                  <a:latin typeface="Helvetica"/>
+                  <a:cs typeface="Helvetica"/>
+                </a:rPr>
+                <a:t>30</a:t>
+              </a:r>
+            </a:p>
+          </p:txBody>
+        </p:sp>
+        <p:sp>
+          <p:nvSpPr>
+            <p:cNvPr id="48" name="tx48"/>
+            <p:cNvSpPr/>
+            <p:nvPr/>
+          </p:nvSpPr>
+          <p:spPr>
+            <a:xfrm>
+              <a:off x="7733508" y="5693022"/>
+              <a:ext cx="158008" cy="101955"/>
+            </a:xfrm>
+            <a:prstGeom prst="rect">
+              <a:avLst/>
+            </a:prstGeom>
+            <a:noFill/>
+          </p:spPr>
+          <p:txBody>
+            <a:bodyPr lIns="0" rIns="0" tIns="0" bIns="0" anchorCtr="1" anchor="ctr" wrap="none"/>
+            <a:lstStyle/>
+            <a:p>
+              <a:pPr algn="l" marL="0" marR="0" indent="0">
+                <a:lnSpc>
+                  <a:spcPts val="1120"/>
+                </a:lnSpc>
+                <a:spcBef>
+                  <a:spcPts val="0"/>
+                </a:spcBef>
+                <a:spcAft>
+                  <a:spcPts val="0"/>
+                </a:spcAft>
+              </a:pPr>
+              <a:r>
+                <a:rPr sz="1120">
+                  <a:solidFill>
+                    <a:srgbClr val="4D4D4D">
+                      <a:alpha val="100000"/>
+                    </a:srgbClr>
+                  </a:solidFill>
+                  <a:latin typeface="Helvetica"/>
+                  <a:cs typeface="Helvetica"/>
+                </a:rPr>
+                <a:t>40</a:t>
+              </a:r>
+            </a:p>
+          </p:txBody>
+        </p:sp>
+        <p:sp>
+          <p:nvSpPr>
+            <p:cNvPr id="49" name="tx49"/>
+            <p:cNvSpPr/>
+            <p:nvPr/>
+          </p:nvSpPr>
+          <p:spPr>
+            <a:xfrm>
+              <a:off x="3941888" y="5870717"/>
+              <a:ext cx="1630100" cy="127558"/>
             </a:xfrm>
             <a:prstGeom prst="rect">
               <a:avLst/>
@@ -4904,572 +5475,20 @@
                   <a:latin typeface="Helvetica"/>
                   <a:cs typeface="Helvetica"/>
                 </a:rPr>
-                <a:t>eGFR difference  =  (eGFR</a:t>
+                <a:t>eGFR difference (%)</a:t>
               </a:r>
             </a:p>
           </p:txBody>
         </p:sp>
         <p:sp>
           <p:nvSpPr>
-            <p:cNvPr id="37" name="tx37"/>
-            <p:cNvSpPr/>
-            <p:nvPr/>
-          </p:nvSpPr>
-          <p:spPr>
-            <a:xfrm>
-              <a:off x="4827210" y="5905308"/>
-              <a:ext cx="89885" cy="89245"/>
-            </a:xfrm>
-            <a:prstGeom prst="rect">
-              <a:avLst/>
-            </a:prstGeom>
-            <a:noFill/>
-          </p:spPr>
-          <p:txBody>
-            <a:bodyPr lIns="0" rIns="0" tIns="0" bIns="0" anchorCtr="1" anchor="ctr" wrap="none"/>
-            <a:lstStyle/>
-            <a:p>
-              <a:pPr algn="l" marL="0" marR="0" indent="0">
-                <a:lnSpc>
-                  <a:spcPts val="979"/>
-                </a:lnSpc>
-                <a:spcBef>
-                  <a:spcPts val="0"/>
-                </a:spcBef>
-                <a:spcAft>
-                  <a:spcPts val="0"/>
-                </a:spcAft>
-              </a:pPr>
-              <a:r>
-                <a:rPr sz="979">
-                  <a:solidFill>
-                    <a:srgbClr val="000000">
-                      <a:alpha val="100000"/>
-                    </a:srgbClr>
-                  </a:solidFill>
-                  <a:latin typeface="Helvetica"/>
-                  <a:cs typeface="Helvetica"/>
-                </a:rPr>
-                <a:t>C</a:t>
-              </a:r>
-            </a:p>
-          </p:txBody>
-        </p:sp>
-        <p:sp>
-          <p:nvSpPr>
-            <p:cNvPr id="38" name="tx38"/>
-            <p:cNvSpPr/>
-            <p:nvPr/>
-          </p:nvSpPr>
-          <p:spPr>
-            <a:xfrm>
-              <a:off x="4917095" y="5905308"/>
-              <a:ext cx="89885" cy="89245"/>
-            </a:xfrm>
-            <a:prstGeom prst="rect">
-              <a:avLst/>
-            </a:prstGeom>
-            <a:noFill/>
-          </p:spPr>
-          <p:txBody>
-            <a:bodyPr lIns="0" rIns="0" tIns="0" bIns="0" anchorCtr="1" anchor="ctr" wrap="none"/>
-            <a:lstStyle/>
-            <a:p>
-              <a:pPr algn="l" marL="0" marR="0" indent="0">
-                <a:lnSpc>
-                  <a:spcPts val="979"/>
-                </a:lnSpc>
-                <a:spcBef>
-                  <a:spcPts val="0"/>
-                </a:spcBef>
-                <a:spcAft>
-                  <a:spcPts val="0"/>
-                </a:spcAft>
-              </a:pPr>
-              <a:r>
-                <a:rPr sz="979">
-                  <a:solidFill>
-                    <a:srgbClr val="000000">
-                      <a:alpha val="100000"/>
-                    </a:srgbClr>
-                  </a:solidFill>
-                  <a:latin typeface="Helvetica"/>
-                  <a:cs typeface="Helvetica"/>
-                </a:rPr>
-                <a:t>R</a:t>
-              </a:r>
-            </a:p>
-          </p:txBody>
-        </p:sp>
-        <p:sp>
-          <p:nvSpPr>
-            <p:cNvPr id="39" name="tx39"/>
-            <p:cNvSpPr/>
-            <p:nvPr/>
-          </p:nvSpPr>
-          <p:spPr>
-            <a:xfrm>
-              <a:off x="5006981" y="5884826"/>
-              <a:ext cx="68305" cy="109728"/>
-            </a:xfrm>
-            <a:prstGeom prst="rect">
-              <a:avLst/>
-            </a:prstGeom>
-            <a:noFill/>
-          </p:spPr>
-          <p:txBody>
-            <a:bodyPr lIns="0" rIns="0" tIns="0" bIns="0" anchorCtr="1" anchor="ctr" wrap="none"/>
-            <a:lstStyle/>
-            <a:p>
-              <a:pPr algn="l" marL="0" marR="0" indent="0">
-                <a:lnSpc>
-                  <a:spcPts val="979"/>
-                </a:lnSpc>
-                <a:spcBef>
-                  <a:spcPts val="0"/>
-                </a:spcBef>
-                <a:spcAft>
-                  <a:spcPts val="0"/>
-                </a:spcAft>
-              </a:pPr>
-              <a:r>
-                <a:rPr sz="979">
-                  <a:solidFill>
-                    <a:srgbClr val="000000">
-                      <a:alpha val="100000"/>
-                    </a:srgbClr>
-                  </a:solidFill>
-                  <a:latin typeface="Symbol"/>
-                  <a:cs typeface="Symbol"/>
-                </a:rPr>
-                <a:t>−</a:t>
-              </a:r>
-            </a:p>
-          </p:txBody>
-        </p:sp>
-        <p:sp>
-          <p:nvSpPr>
-            <p:cNvPr id="40" name="tx40"/>
-            <p:cNvSpPr/>
-            <p:nvPr/>
-          </p:nvSpPr>
-          <p:spPr>
-            <a:xfrm>
-              <a:off x="5075286" y="5905308"/>
-              <a:ext cx="89885" cy="89245"/>
-            </a:xfrm>
-            <a:prstGeom prst="rect">
-              <a:avLst/>
-            </a:prstGeom>
-            <a:noFill/>
-          </p:spPr>
-          <p:txBody>
-            <a:bodyPr lIns="0" rIns="0" tIns="0" bIns="0" anchorCtr="1" anchor="ctr" wrap="none"/>
-            <a:lstStyle/>
-            <a:p>
-              <a:pPr algn="l" marL="0" marR="0" indent="0">
-                <a:lnSpc>
-                  <a:spcPts val="979"/>
-                </a:lnSpc>
-                <a:spcBef>
-                  <a:spcPts val="0"/>
-                </a:spcBef>
-                <a:spcAft>
-                  <a:spcPts val="0"/>
-                </a:spcAft>
-              </a:pPr>
-              <a:r>
-                <a:rPr sz="979">
-                  <a:solidFill>
-                    <a:srgbClr val="000000">
-                      <a:alpha val="100000"/>
-                    </a:srgbClr>
-                  </a:solidFill>
-                  <a:latin typeface="Helvetica"/>
-                  <a:cs typeface="Helvetica"/>
-                </a:rPr>
-                <a:t>C</a:t>
-              </a:r>
-            </a:p>
-          </p:txBody>
-        </p:sp>
-        <p:sp>
-          <p:nvSpPr>
-            <p:cNvPr id="41" name="tx41"/>
-            <p:cNvSpPr/>
-            <p:nvPr/>
-          </p:nvSpPr>
-          <p:spPr>
-            <a:xfrm>
-              <a:off x="5165172" y="5905308"/>
-              <a:ext cx="83027" cy="89245"/>
-            </a:xfrm>
-            <a:prstGeom prst="rect">
-              <a:avLst/>
-            </a:prstGeom>
-            <a:noFill/>
-          </p:spPr>
-          <p:txBody>
-            <a:bodyPr lIns="0" rIns="0" tIns="0" bIns="0" anchorCtr="1" anchor="ctr" wrap="none"/>
-            <a:lstStyle/>
-            <a:p>
-              <a:pPr algn="l" marL="0" marR="0" indent="0">
-                <a:lnSpc>
-                  <a:spcPts val="979"/>
-                </a:lnSpc>
-                <a:spcBef>
-                  <a:spcPts val="0"/>
-                </a:spcBef>
-                <a:spcAft>
-                  <a:spcPts val="0"/>
-                </a:spcAft>
-              </a:pPr>
-              <a:r>
-                <a:rPr sz="979">
-                  <a:solidFill>
-                    <a:srgbClr val="000000">
-                      <a:alpha val="100000"/>
-                    </a:srgbClr>
-                  </a:solidFill>
-                  <a:latin typeface="Helvetica"/>
-                  <a:cs typeface="Helvetica"/>
-                </a:rPr>
-                <a:t>Y</a:t>
-              </a:r>
-            </a:p>
-          </p:txBody>
-        </p:sp>
-        <p:sp>
-          <p:nvSpPr>
-            <p:cNvPr id="42" name="tx42"/>
-            <p:cNvSpPr/>
-            <p:nvPr/>
-          </p:nvSpPr>
-          <p:spPr>
-            <a:xfrm>
-              <a:off x="5248199" y="5905308"/>
-              <a:ext cx="83027" cy="89245"/>
-            </a:xfrm>
-            <a:prstGeom prst="rect">
-              <a:avLst/>
-            </a:prstGeom>
-            <a:noFill/>
-          </p:spPr>
-          <p:txBody>
-            <a:bodyPr lIns="0" rIns="0" tIns="0" bIns="0" anchorCtr="1" anchor="ctr" wrap="none"/>
-            <a:lstStyle/>
-            <a:p>
-              <a:pPr algn="l" marL="0" marR="0" indent="0">
-                <a:lnSpc>
-                  <a:spcPts val="979"/>
-                </a:lnSpc>
-                <a:spcBef>
-                  <a:spcPts val="0"/>
-                </a:spcBef>
-                <a:spcAft>
-                  <a:spcPts val="0"/>
-                </a:spcAft>
-              </a:pPr>
-              <a:r>
-                <a:rPr sz="979">
-                  <a:solidFill>
-                    <a:srgbClr val="000000">
-                      <a:alpha val="100000"/>
-                    </a:srgbClr>
-                  </a:solidFill>
-                  <a:latin typeface="Helvetica"/>
-                  <a:cs typeface="Helvetica"/>
-                </a:rPr>
-                <a:t>S</a:t>
-              </a:r>
-            </a:p>
-          </p:txBody>
-        </p:sp>
-        <p:sp>
-          <p:nvSpPr>
-            <p:cNvPr id="43" name="tx43"/>
-            <p:cNvSpPr/>
-            <p:nvPr/>
-          </p:nvSpPr>
-          <p:spPr>
-            <a:xfrm>
-              <a:off x="5331227" y="5834415"/>
-              <a:ext cx="558149" cy="127558"/>
-            </a:xfrm>
-            <a:prstGeom prst="rect">
-              <a:avLst/>
-            </a:prstGeom>
-            <a:noFill/>
-          </p:spPr>
-          <p:txBody>
-            <a:bodyPr lIns="0" rIns="0" tIns="0" bIns="0" anchorCtr="1" anchor="ctr" wrap="none"/>
-            <a:lstStyle/>
-            <a:p>
-              <a:pPr algn="l" marL="0" marR="0" indent="0">
-                <a:lnSpc>
-                  <a:spcPts val="1400"/>
-                </a:lnSpc>
-                <a:spcBef>
-                  <a:spcPts val="0"/>
-                </a:spcBef>
-                <a:spcAft>
-                  <a:spcPts val="0"/>
-                </a:spcAft>
-              </a:pPr>
-              <a:r>
-                <a:rPr sz="1400">
-                  <a:solidFill>
-                    <a:srgbClr val="000000">
-                      <a:alpha val="100000"/>
-                    </a:srgbClr>
-                  </a:solidFill>
-                  <a:latin typeface="Helvetica"/>
-                  <a:cs typeface="Helvetica"/>
-                </a:rPr>
-                <a:t> − CrCl</a:t>
-              </a:r>
-            </a:p>
-          </p:txBody>
-        </p:sp>
-        <p:sp>
-          <p:nvSpPr>
-            <p:cNvPr id="44" name="tx44"/>
-            <p:cNvSpPr/>
-            <p:nvPr/>
-          </p:nvSpPr>
-          <p:spPr>
-            <a:xfrm>
-              <a:off x="5889377" y="5905308"/>
-              <a:ext cx="89885" cy="89245"/>
-            </a:xfrm>
-            <a:prstGeom prst="rect">
-              <a:avLst/>
-            </a:prstGeom>
-            <a:noFill/>
-          </p:spPr>
-          <p:txBody>
-            <a:bodyPr lIns="0" rIns="0" tIns="0" bIns="0" anchorCtr="1" anchor="ctr" wrap="none"/>
-            <a:lstStyle/>
-            <a:p>
-              <a:pPr algn="l" marL="0" marR="0" indent="0">
-                <a:lnSpc>
-                  <a:spcPts val="979"/>
-                </a:lnSpc>
-                <a:spcBef>
-                  <a:spcPts val="0"/>
-                </a:spcBef>
-                <a:spcAft>
-                  <a:spcPts val="0"/>
-                </a:spcAft>
-              </a:pPr>
-              <a:r>
-                <a:rPr sz="979">
-                  <a:solidFill>
-                    <a:srgbClr val="000000">
-                      <a:alpha val="100000"/>
-                    </a:srgbClr>
-                  </a:solidFill>
-                  <a:latin typeface="Helvetica"/>
-                  <a:cs typeface="Helvetica"/>
-                </a:rPr>
-                <a:t>C</a:t>
-              </a:r>
-            </a:p>
-          </p:txBody>
-        </p:sp>
-        <p:sp>
-          <p:nvSpPr>
-            <p:cNvPr id="45" name="tx45"/>
-            <p:cNvSpPr/>
-            <p:nvPr/>
-          </p:nvSpPr>
-          <p:spPr>
-            <a:xfrm>
-              <a:off x="5979262" y="5905308"/>
-              <a:ext cx="96743" cy="89245"/>
-            </a:xfrm>
-            <a:prstGeom prst="rect">
-              <a:avLst/>
-            </a:prstGeom>
-            <a:noFill/>
-          </p:spPr>
-          <p:txBody>
-            <a:bodyPr lIns="0" rIns="0" tIns="0" bIns="0" anchorCtr="1" anchor="ctr" wrap="none"/>
-            <a:lstStyle/>
-            <a:p>
-              <a:pPr algn="l" marL="0" marR="0" indent="0">
-                <a:lnSpc>
-                  <a:spcPts val="979"/>
-                </a:lnSpc>
-                <a:spcBef>
-                  <a:spcPts val="0"/>
-                </a:spcBef>
-                <a:spcAft>
-                  <a:spcPts val="0"/>
-                </a:spcAft>
-              </a:pPr>
-              <a:r>
-                <a:rPr sz="979">
-                  <a:solidFill>
-                    <a:srgbClr val="000000">
-                      <a:alpha val="100000"/>
-                    </a:srgbClr>
-                  </a:solidFill>
-                  <a:latin typeface="Helvetica"/>
-                  <a:cs typeface="Helvetica"/>
-                </a:rPr>
-                <a:t>G</a:t>
-              </a:r>
-            </a:p>
-          </p:txBody>
-        </p:sp>
-        <p:sp>
-          <p:nvSpPr>
-            <p:cNvPr id="46" name="tx46"/>
-            <p:cNvSpPr/>
-            <p:nvPr/>
-          </p:nvSpPr>
-          <p:spPr>
-            <a:xfrm>
-              <a:off x="6076006" y="5834415"/>
-              <a:ext cx="562904" cy="127558"/>
-            </a:xfrm>
-            <a:prstGeom prst="rect">
-              <a:avLst/>
-            </a:prstGeom>
-            <a:noFill/>
-          </p:spPr>
-          <p:txBody>
-            <a:bodyPr lIns="0" rIns="0" tIns="0" bIns="0" anchorCtr="1" anchor="ctr" wrap="none"/>
-            <a:lstStyle/>
-            <a:p>
-              <a:pPr algn="l" marL="0" marR="0" indent="0">
-                <a:lnSpc>
-                  <a:spcPts val="1400"/>
-                </a:lnSpc>
-                <a:spcBef>
-                  <a:spcPts val="0"/>
-                </a:spcBef>
-                <a:spcAft>
-                  <a:spcPts val="0"/>
-                </a:spcAft>
-              </a:pPr>
-              <a:r>
-                <a:rPr sz="1400">
-                  <a:solidFill>
-                    <a:srgbClr val="000000">
-                      <a:alpha val="100000"/>
-                    </a:srgbClr>
-                  </a:solidFill>
-                  <a:latin typeface="Helvetica"/>
-                  <a:cs typeface="Helvetica"/>
-                </a:rPr>
-                <a:t>) / CrCl</a:t>
-              </a:r>
-            </a:p>
-          </p:txBody>
-        </p:sp>
-        <p:sp>
-          <p:nvSpPr>
-            <p:cNvPr id="47" name="tx47"/>
-            <p:cNvSpPr/>
-            <p:nvPr/>
-          </p:nvSpPr>
-          <p:spPr>
-            <a:xfrm>
-              <a:off x="6638910" y="5905308"/>
-              <a:ext cx="89885" cy="89245"/>
-            </a:xfrm>
-            <a:prstGeom prst="rect">
-              <a:avLst/>
-            </a:prstGeom>
-            <a:noFill/>
-          </p:spPr>
-          <p:txBody>
-            <a:bodyPr lIns="0" rIns="0" tIns="0" bIns="0" anchorCtr="1" anchor="ctr" wrap="none"/>
-            <a:lstStyle/>
-            <a:p>
-              <a:pPr algn="l" marL="0" marR="0" indent="0">
-                <a:lnSpc>
-                  <a:spcPts val="979"/>
-                </a:lnSpc>
-                <a:spcBef>
-                  <a:spcPts val="0"/>
-                </a:spcBef>
-                <a:spcAft>
-                  <a:spcPts val="0"/>
-                </a:spcAft>
-              </a:pPr>
-              <a:r>
-                <a:rPr sz="979">
-                  <a:solidFill>
-                    <a:srgbClr val="000000">
-                      <a:alpha val="100000"/>
-                    </a:srgbClr>
-                  </a:solidFill>
-                  <a:latin typeface="Helvetica"/>
-                  <a:cs typeface="Helvetica"/>
-                </a:rPr>
-                <a:t>C</a:t>
-              </a:r>
-            </a:p>
-          </p:txBody>
-        </p:sp>
-        <p:sp>
-          <p:nvSpPr>
-            <p:cNvPr id="48" name="tx48"/>
-            <p:cNvSpPr/>
-            <p:nvPr/>
-          </p:nvSpPr>
-          <p:spPr>
-            <a:xfrm>
-              <a:off x="6728796" y="5905308"/>
-              <a:ext cx="96743" cy="89245"/>
-            </a:xfrm>
-            <a:prstGeom prst="rect">
-              <a:avLst/>
-            </a:prstGeom>
-            <a:noFill/>
-          </p:spPr>
-          <p:txBody>
-            <a:bodyPr lIns="0" rIns="0" tIns="0" bIns="0" anchorCtr="1" anchor="ctr" wrap="none"/>
-            <a:lstStyle/>
-            <a:p>
-              <a:pPr algn="l" marL="0" marR="0" indent="0">
-                <a:lnSpc>
-                  <a:spcPts val="979"/>
-                </a:lnSpc>
-                <a:spcBef>
-                  <a:spcPts val="0"/>
-                </a:spcBef>
-                <a:spcAft>
-                  <a:spcPts val="0"/>
-                </a:spcAft>
-              </a:pPr>
-              <a:r>
-                <a:rPr sz="979">
-                  <a:solidFill>
-                    <a:srgbClr val="000000">
-                      <a:alpha val="100000"/>
-                    </a:srgbClr>
-                  </a:solidFill>
-                  <a:latin typeface="Helvetica"/>
-                  <a:cs typeface="Helvetica"/>
-                </a:rPr>
-                <a:t>G</a:t>
-              </a:r>
-            </a:p>
-          </p:txBody>
-        </p:sp>
-        <p:sp>
-          <p:nvSpPr>
-            <p:cNvPr id="49" name="tx49"/>
+            <p:cNvPr id="50" name="tx50"/>
             <p:cNvSpPr/>
             <p:nvPr/>
           </p:nvSpPr>
           <p:spPr>
             <a:xfrm rot="-5400000">
-              <a:off x="-37527" y="3827572"/>
+              <a:off x="-37527" y="3835619"/>
               <a:ext cx="1294150" cy="127558"/>
             </a:xfrm>
             <a:prstGeom prst="rect">
@@ -5509,14 +5528,14 @@
         </p:sp>
         <p:sp>
           <p:nvSpPr>
-            <p:cNvPr id="50" name="tx50"/>
+            <p:cNvPr id="51" name="tx51"/>
             <p:cNvSpPr/>
             <p:nvPr/>
           </p:nvSpPr>
           <p:spPr>
             <a:xfrm>
               <a:off x="915645" y="1977589"/>
-              <a:ext cx="5929701" cy="109362"/>
+              <a:ext cx="3712646" cy="91165"/>
             </a:xfrm>
             <a:prstGeom prst="rect">
               <a:avLst/>
@@ -5529,7 +5548,7 @@
             <a:p>
               <a:pPr algn="l" marL="0" marR="0" indent="0">
                 <a:lnSpc>
-                  <a:spcPts val="1200"/>
+                  <a:spcPts val="1000"/>
                 </a:lnSpc>
                 <a:spcBef>
                   <a:spcPts val="0"/>
@@ -5539,7 +5558,7 @@
                 </a:spcAft>
               </a:pPr>
               <a:r>
-                <a:rPr sz="1200">
+                <a:rPr sz="1000">
                   <a:solidFill>
                     <a:srgbClr val="404040">
                       <a:alpha val="100000"/>
@@ -5548,14 +5567,14 @@
                   <a:latin typeface="Helvetica"/>
                   <a:cs typeface="Helvetica"/>
                 </a:rPr>
-                <a:t>subHR = 0.61 (95% CI 0.39-0.93), p = 0.021   (per 0.1-unit increase in eGFR difference)</a:t>
+                <a:t>subHR = 1.65 (95% CI 1.08-2.53), p = 0.021   (per 10% decrease)</a:t>
               </a:r>
             </a:p>
           </p:txBody>
         </p:sp>
         <p:sp>
           <p:nvSpPr>
-            <p:cNvPr id="51" name="tx51"/>
+            <p:cNvPr id="52" name="tx52"/>
             <p:cNvSpPr/>
             <p:nvPr/>
           </p:nvSpPr>
